--- a/Weekly_Log/HG/프로젝트오푸스_송형규_신성재_중간발표.pptx
+++ b/Weekly_Log/HG/프로젝트오푸스_송형규_신성재_중간발표.pptx
@@ -9,13 +9,12 @@
     <p:sldId id="287" r:id="rId3"/>
     <p:sldId id="260" r:id="rId4"/>
     <p:sldId id="282" r:id="rId5"/>
-    <p:sldId id="283" r:id="rId6"/>
-    <p:sldId id="288" r:id="rId7"/>
+    <p:sldId id="294" r:id="rId6"/>
+    <p:sldId id="293" r:id="rId7"/>
     <p:sldId id="290" r:id="rId8"/>
     <p:sldId id="289" r:id="rId9"/>
     <p:sldId id="292" r:id="rId10"/>
     <p:sldId id="291" r:id="rId11"/>
-    <p:sldId id="275" r:id="rId12"/>
   </p:sldIdLst>
   <p:sldSz cx="12192000" cy="6858000"/>
   <p:notesSz cx="6858000" cy="9144000"/>
@@ -269,7 +268,7 @@
           <a:p>
             <a:fld id="{4B614FBA-CC48-4B06-BAA0-6C490FF78C72}" type="datetimeFigureOut">
               <a:rPr lang="ko-KR" altLang="en-US" smtClean="0"/>
-              <a:t>2026-03-26</a:t>
+              <a:t>2026-03-29</a:t>
             </a:fld>
             <a:endParaRPr lang="ko-KR" altLang="en-US"/>
           </a:p>
@@ -467,7 +466,7 @@
           <a:p>
             <a:fld id="{4B614FBA-CC48-4B06-BAA0-6C490FF78C72}" type="datetimeFigureOut">
               <a:rPr lang="ko-KR" altLang="en-US" smtClean="0"/>
-              <a:t>2026-03-26</a:t>
+              <a:t>2026-03-29</a:t>
             </a:fld>
             <a:endParaRPr lang="ko-KR" altLang="en-US"/>
           </a:p>
@@ -675,7 +674,7 @@
           <a:p>
             <a:fld id="{4B614FBA-CC48-4B06-BAA0-6C490FF78C72}" type="datetimeFigureOut">
               <a:rPr lang="ko-KR" altLang="en-US" smtClean="0"/>
-              <a:t>2026-03-26</a:t>
+              <a:t>2026-03-29</a:t>
             </a:fld>
             <a:endParaRPr lang="ko-KR" altLang="en-US"/>
           </a:p>
@@ -873,7 +872,7 @@
           <a:p>
             <a:fld id="{4B614FBA-CC48-4B06-BAA0-6C490FF78C72}" type="datetimeFigureOut">
               <a:rPr lang="ko-KR" altLang="en-US" smtClean="0"/>
-              <a:t>2026-03-26</a:t>
+              <a:t>2026-03-29</a:t>
             </a:fld>
             <a:endParaRPr lang="ko-KR" altLang="en-US"/>
           </a:p>
@@ -1148,7 +1147,7 @@
           <a:p>
             <a:fld id="{4B614FBA-CC48-4B06-BAA0-6C490FF78C72}" type="datetimeFigureOut">
               <a:rPr lang="ko-KR" altLang="en-US" smtClean="0"/>
-              <a:t>2026-03-26</a:t>
+              <a:t>2026-03-29</a:t>
             </a:fld>
             <a:endParaRPr lang="ko-KR" altLang="en-US"/>
           </a:p>
@@ -1413,7 +1412,7 @@
           <a:p>
             <a:fld id="{4B614FBA-CC48-4B06-BAA0-6C490FF78C72}" type="datetimeFigureOut">
               <a:rPr lang="ko-KR" altLang="en-US" smtClean="0"/>
-              <a:t>2026-03-26</a:t>
+              <a:t>2026-03-29</a:t>
             </a:fld>
             <a:endParaRPr lang="ko-KR" altLang="en-US"/>
           </a:p>
@@ -1825,7 +1824,7 @@
           <a:p>
             <a:fld id="{4B614FBA-CC48-4B06-BAA0-6C490FF78C72}" type="datetimeFigureOut">
               <a:rPr lang="ko-KR" altLang="en-US" smtClean="0"/>
-              <a:t>2026-03-26</a:t>
+              <a:t>2026-03-29</a:t>
             </a:fld>
             <a:endParaRPr lang="ko-KR" altLang="en-US"/>
           </a:p>
@@ -1966,7 +1965,7 @@
           <a:p>
             <a:fld id="{4B614FBA-CC48-4B06-BAA0-6C490FF78C72}" type="datetimeFigureOut">
               <a:rPr lang="ko-KR" altLang="en-US" smtClean="0"/>
-              <a:t>2026-03-26</a:t>
+              <a:t>2026-03-29</a:t>
             </a:fld>
             <a:endParaRPr lang="ko-KR" altLang="en-US"/>
           </a:p>
@@ -2079,7 +2078,7 @@
           <a:p>
             <a:fld id="{4B614FBA-CC48-4B06-BAA0-6C490FF78C72}" type="datetimeFigureOut">
               <a:rPr lang="ko-KR" altLang="en-US" smtClean="0"/>
-              <a:t>2026-03-26</a:t>
+              <a:t>2026-03-29</a:t>
             </a:fld>
             <a:endParaRPr lang="ko-KR" altLang="en-US"/>
           </a:p>
@@ -2390,7 +2389,7 @@
           <a:p>
             <a:fld id="{4B614FBA-CC48-4B06-BAA0-6C490FF78C72}" type="datetimeFigureOut">
               <a:rPr lang="ko-KR" altLang="en-US" smtClean="0"/>
-              <a:t>2026-03-26</a:t>
+              <a:t>2026-03-29</a:t>
             </a:fld>
             <a:endParaRPr lang="ko-KR" altLang="en-US"/>
           </a:p>
@@ -2678,7 +2677,7 @@
           <a:p>
             <a:fld id="{4B614FBA-CC48-4B06-BAA0-6C490FF78C72}" type="datetimeFigureOut">
               <a:rPr lang="ko-KR" altLang="en-US" smtClean="0"/>
-              <a:t>2026-03-26</a:t>
+              <a:t>2026-03-29</a:t>
             </a:fld>
             <a:endParaRPr lang="ko-KR" altLang="en-US"/>
           </a:p>
@@ -2919,7 +2918,7 @@
           <a:p>
             <a:fld id="{4B614FBA-CC48-4B06-BAA0-6C490FF78C72}" type="datetimeFigureOut">
               <a:rPr lang="ko-KR" altLang="en-US" smtClean="0"/>
-              <a:t>2026-03-26</a:t>
+              <a:t>2026-03-29</a:t>
             </a:fld>
             <a:endParaRPr lang="ko-KR" altLang="en-US"/>
           </a:p>
@@ -3779,181 +3778,6 @@
 </p:sld>
 </file>
 
-<file path=ppt/slides/slide11.xml><?xml version="1.0" encoding="utf-8"?>
-<p:sld xmlns:a="http://schemas.openxmlformats.org/drawingml/2006/main" xmlns:r="http://schemas.openxmlformats.org/officeDocument/2006/relationships" xmlns:p="http://schemas.openxmlformats.org/presentationml/2006/main">
-  <p:cSld>
-    <p:spTree>
-      <p:nvGrpSpPr>
-        <p:cNvPr id="1" name="">
-          <a:extLst>
-            <a:ext uri="{FF2B5EF4-FFF2-40B4-BE49-F238E27FC236}">
-              <a16:creationId xmlns:a16="http://schemas.microsoft.com/office/drawing/2014/main" id="{0D2EBBA3-EFF5-0E4C-5B2D-9FCB2F72A87F}"/>
-            </a:ext>
-          </a:extLst>
-        </p:cNvPr>
-        <p:cNvGrpSpPr/>
-        <p:nvPr/>
-      </p:nvGrpSpPr>
-      <p:grpSpPr>
-        <a:xfrm>
-          <a:off x="0" y="0"/>
-          <a:ext cx="0" cy="0"/>
-          <a:chOff x="0" y="0"/>
-          <a:chExt cx="0" cy="0"/>
-        </a:xfrm>
-      </p:grpSpPr>
-      <p:pic>
-        <p:nvPicPr>
-          <p:cNvPr id="6" name="그림 5" descr="스크린샷, 텍스트, 가전용품, 실내이(가) 표시된 사진&#10;&#10;AI 생성 콘텐츠는 정확하지 않을 수 있습니다.">
-            <a:extLst>
-              <a:ext uri="{FF2B5EF4-FFF2-40B4-BE49-F238E27FC236}">
-                <a16:creationId xmlns:a16="http://schemas.microsoft.com/office/drawing/2014/main" id="{18A0A5C8-D459-9322-E7E2-E64E9577ACDB}"/>
-              </a:ext>
-            </a:extLst>
-          </p:cNvPr>
-          <p:cNvPicPr>
-            <a:picLocks noChangeAspect="1"/>
-          </p:cNvPicPr>
-          <p:nvPr/>
-        </p:nvPicPr>
-        <p:blipFill>
-          <a:blip r:embed="rId2">
-            <a:extLst>
-              <a:ext uri="{28A0092B-C50C-407E-A947-70E740481C1C}">
-                <a14:useLocalDpi xmlns:a14="http://schemas.microsoft.com/office/drawing/2010/main" val="0"/>
-              </a:ext>
-            </a:extLst>
-          </a:blip>
-          <a:srcRect b="17242"/>
-          <a:stretch>
-            <a:fillRect/>
-          </a:stretch>
-        </p:blipFill>
-        <p:spPr>
-          <a:xfrm>
-            <a:off x="0" y="0"/>
-            <a:ext cx="12192000" cy="6858000"/>
-          </a:xfrm>
-          <a:prstGeom prst="rect">
-            <a:avLst/>
-          </a:prstGeom>
-        </p:spPr>
-      </p:pic>
-      <p:sp>
-        <p:nvSpPr>
-          <p:cNvPr id="10" name="직사각형 9">
-            <a:extLst>
-              <a:ext uri="{FF2B5EF4-FFF2-40B4-BE49-F238E27FC236}">
-                <a16:creationId xmlns:a16="http://schemas.microsoft.com/office/drawing/2014/main" id="{1C0D971A-BCB6-3F71-3E8D-45425B9AA98F}"/>
-              </a:ext>
-            </a:extLst>
-          </p:cNvPr>
-          <p:cNvSpPr/>
-          <p:nvPr/>
-        </p:nvSpPr>
-        <p:spPr>
-          <a:xfrm>
-            <a:off x="21" y="10"/>
-            <a:ext cx="12191979" cy="6857990"/>
-          </a:xfrm>
-          <a:prstGeom prst="rect">
-            <a:avLst/>
-          </a:prstGeom>
-          <a:solidFill>
-            <a:schemeClr val="tx1">
-              <a:alpha val="80000"/>
-            </a:schemeClr>
-          </a:solidFill>
-          <a:ln>
-            <a:solidFill>
-              <a:schemeClr val="tx1"/>
-            </a:solidFill>
-          </a:ln>
-        </p:spPr>
-        <p:style>
-          <a:lnRef idx="2">
-            <a:schemeClr val="accent1">
-              <a:shade val="15000"/>
-            </a:schemeClr>
-          </a:lnRef>
-          <a:fillRef idx="1">
-            <a:schemeClr val="accent1"/>
-          </a:fillRef>
-          <a:effectRef idx="0">
-            <a:schemeClr val="accent1"/>
-          </a:effectRef>
-          <a:fontRef idx="minor">
-            <a:schemeClr val="lt1"/>
-          </a:fontRef>
-        </p:style>
-        <p:txBody>
-          <a:bodyPr rtlCol="0" anchor="ctr"/>
-          <a:lstStyle/>
-          <a:p>
-            <a:pPr algn="ctr"/>
-            <a:endParaRPr lang="ko-KR" altLang="en-US">
-              <a:solidFill>
-                <a:sysClr val="windowText" lastClr="000000"/>
-              </a:solidFill>
-            </a:endParaRPr>
-          </a:p>
-        </p:txBody>
-      </p:sp>
-      <p:sp>
-        <p:nvSpPr>
-          <p:cNvPr id="9" name="TextBox 8">
-            <a:extLst>
-              <a:ext uri="{FF2B5EF4-FFF2-40B4-BE49-F238E27FC236}">
-                <a16:creationId xmlns:a16="http://schemas.microsoft.com/office/drawing/2014/main" id="{48504A40-24AE-8CD4-1E06-75A94A81C1B5}"/>
-              </a:ext>
-            </a:extLst>
-          </p:cNvPr>
-          <p:cNvSpPr txBox="1"/>
-          <p:nvPr/>
-        </p:nvSpPr>
-        <p:spPr>
-          <a:xfrm>
-            <a:off x="3593690" y="2890391"/>
-            <a:ext cx="5004620" cy="1077218"/>
-          </a:xfrm>
-          <a:prstGeom prst="rect">
-            <a:avLst/>
-          </a:prstGeom>
-          <a:noFill/>
-        </p:spPr>
-        <p:txBody>
-          <a:bodyPr wrap="square" rtlCol="0">
-            <a:spAutoFit/>
-          </a:bodyPr>
-          <a:lstStyle/>
-          <a:p>
-            <a:pPr algn="ctr"/>
-            <a:r>
-              <a:rPr lang="ko-KR" altLang="en-US" sz="6400" b="1" dirty="0">
-                <a:solidFill>
-                  <a:schemeClr val="bg1"/>
-                </a:solidFill>
-                <a:latin typeface="G마켓 산스 TTF Bold" panose="02000000000000000000" pitchFamily="2" charset="-127"/>
-                <a:ea typeface="G마켓 산스 TTF Bold" panose="02000000000000000000" pitchFamily="2" charset="-127"/>
-              </a:rPr>
-              <a:t>감사합니다</a:t>
-            </a:r>
-          </a:p>
-        </p:txBody>
-      </p:sp>
-    </p:spTree>
-    <p:extLst>
-      <p:ext uri="{BB962C8B-B14F-4D97-AF65-F5344CB8AC3E}">
-        <p14:creationId xmlns:p14="http://schemas.microsoft.com/office/powerpoint/2010/main" val="1342797763"/>
-      </p:ext>
-    </p:extLst>
-  </p:cSld>
-  <p:clrMapOvr>
-    <a:masterClrMapping/>
-  </p:clrMapOvr>
-</p:sld>
-</file>
-
 <file path=ppt/slides/slide2.xml><?xml version="1.0" encoding="utf-8"?>
 <p:sld xmlns:a="http://schemas.openxmlformats.org/drawingml/2006/main" xmlns:r="http://schemas.openxmlformats.org/officeDocument/2006/relationships" xmlns:p="http://schemas.openxmlformats.org/presentationml/2006/main">
   <p:cSld>
@@ -4914,8 +4738,8 @@
         </p:nvSpPr>
         <p:spPr>
           <a:xfrm>
-            <a:off x="2274324" y="5257459"/>
-            <a:ext cx="7643352" cy="1569660"/>
+            <a:off x="0" y="5257459"/>
+            <a:ext cx="12191978" cy="830997"/>
           </a:xfrm>
           <a:prstGeom prst="rect">
             <a:avLst/>
@@ -4937,7 +4761,27 @@
                 <a:latin typeface="G마켓 산스 TTF Medium" panose="02000000000000000000" pitchFamily="2" charset="-127"/>
                 <a:ea typeface="G마켓 산스 TTF Medium" panose="02000000000000000000" pitchFamily="2" charset="-127"/>
               </a:rPr>
-              <a:t>오브젝트의 성질을 실시간으로 </a:t>
+              <a:t>오브젝트의 성질을 실시간으로 바꾸며</a:t>
+            </a:r>
+            <a:r>
+              <a:rPr lang="en-US" altLang="ko-KR" sz="2400" dirty="0">
+                <a:solidFill>
+                  <a:schemeClr val="bg1"/>
+                </a:solidFill>
+                <a:latin typeface="G마켓 산스 TTF Medium" panose="02000000000000000000" pitchFamily="2" charset="-127"/>
+                <a:ea typeface="G마켓 산스 TTF Medium" panose="02000000000000000000" pitchFamily="2" charset="-127"/>
+              </a:rPr>
+              <a:t> </a:t>
+            </a:r>
+            <a:r>
+              <a:rPr lang="ko-KR" altLang="en-US" sz="2400">
+                <a:solidFill>
+                  <a:schemeClr val="bg1"/>
+                </a:solidFill>
+                <a:latin typeface="G마켓 산스 TTF Medium" panose="02000000000000000000" pitchFamily="2" charset="-127"/>
+                <a:ea typeface="G마켓 산스 TTF Medium" panose="02000000000000000000" pitchFamily="2" charset="-127"/>
+              </a:rPr>
+              <a:t>온도나 </a:t>
             </a:r>
             <a:r>
               <a:rPr lang="ko-KR" altLang="en-US" sz="2400" dirty="0">
@@ -4947,27 +4791,7 @@
                 <a:latin typeface="G마켓 산스 TTF Medium" panose="02000000000000000000" pitchFamily="2" charset="-127"/>
                 <a:ea typeface="G마켓 산스 TTF Medium" panose="02000000000000000000" pitchFamily="2" charset="-127"/>
               </a:rPr>
-              <a:t>바꾸며</a:t>
-            </a:r>
-            <a:endParaRPr lang="en-US" altLang="ko-KR" sz="2400" dirty="0">
-              <a:solidFill>
-                <a:schemeClr val="bg1"/>
-              </a:solidFill>
-              <a:latin typeface="G마켓 산스 TTF Medium" panose="02000000000000000000" pitchFamily="2" charset="-127"/>
-              <a:ea typeface="G마켓 산스 TTF Medium" panose="02000000000000000000" pitchFamily="2" charset="-127"/>
-            </a:endParaRPr>
-          </a:p>
-          <a:p>
-            <a:pPr algn="ctr"/>
-            <a:r>
-              <a:rPr lang="ko-KR" altLang="en-US" sz="2400" dirty="0">
-                <a:solidFill>
-                  <a:schemeClr val="bg1"/>
-                </a:solidFill>
-                <a:latin typeface="G마켓 산스 TTF Medium" panose="02000000000000000000" pitchFamily="2" charset="-127"/>
-                <a:ea typeface="G마켓 산스 TTF Medium" panose="02000000000000000000" pitchFamily="2" charset="-127"/>
-              </a:rPr>
-              <a:t>온도나 자기장 같은 </a:t>
+              <a:t>자기장 같은 </a:t>
             </a:r>
             <a:r>
               <a:rPr lang="ko-KR" altLang="en-US" sz="2400">
@@ -4999,16 +4823,16 @@
               </a:rPr>
               <a:t>복합적인 상호작용을 이해하며 풀어나가는</a:t>
             </a:r>
-            <a:endParaRPr lang="en-US" altLang="ko-KR" sz="2400">
-              <a:solidFill>
-                <a:schemeClr val="bg1"/>
-              </a:solidFill>
-              <a:latin typeface="G마켓 산스 TTF Medium" panose="02000000000000000000" pitchFamily="2" charset="-127"/>
-              <a:ea typeface="G마켓 산스 TTF Medium" panose="02000000000000000000" pitchFamily="2" charset="-127"/>
-            </a:endParaRPr>
-          </a:p>
-          <a:p>
-            <a:pPr algn="ctr"/>
+            <a:r>
+              <a:rPr lang="en-US" altLang="ko-KR" sz="2400">
+                <a:solidFill>
+                  <a:schemeClr val="bg1"/>
+                </a:solidFill>
+                <a:latin typeface="G마켓 산스 TTF Medium" panose="02000000000000000000" pitchFamily="2" charset="-127"/>
+                <a:ea typeface="G마켓 산스 TTF Medium" panose="02000000000000000000" pitchFamily="2" charset="-127"/>
+              </a:rPr>
+              <a:t> </a:t>
+            </a:r>
             <a:r>
               <a:rPr lang="ko-KR" altLang="en-US" sz="2400">
                 <a:solidFill>
@@ -5017,7 +4841,7 @@
                 <a:latin typeface="G마켓 산스 TTF Medium" panose="02000000000000000000" pitchFamily="2" charset="-127"/>
                 <a:ea typeface="G마켓 산스 TTF Medium" panose="02000000000000000000" pitchFamily="2" charset="-127"/>
               </a:rPr>
-              <a:t>교육용 퍼즐 </a:t>
+              <a:t>학습용 퍼즐 </a:t>
             </a:r>
             <a:r>
               <a:rPr lang="ko-KR" altLang="en-US" sz="2400" dirty="0">
@@ -5237,7 +5061,7 @@
                 <a:latin typeface="G마켓 산스 TTF Bold" panose="02000000000000000000" pitchFamily="2" charset="-127"/>
                 <a:ea typeface="G마켓 산스 TTF Bold" panose="02000000000000000000" pitchFamily="2" charset="-127"/>
               </a:rPr>
-              <a:t>구성원 역할</a:t>
+              <a:t>구성원 역할 및 중점 연구분야</a:t>
             </a:r>
             <a:endParaRPr lang="ko-KR" altLang="en-US" sz="4800" dirty="0">
               <a:solidFill>
@@ -5263,8 +5087,8 @@
         </p:nvSpPr>
         <p:spPr>
           <a:xfrm>
-            <a:off x="953730" y="1690688"/>
-            <a:ext cx="5142271" cy="1077218"/>
+            <a:off x="838199" y="1690688"/>
+            <a:ext cx="3349913" cy="2369880"/>
           </a:xfrm>
           <a:prstGeom prst="rect">
             <a:avLst/>
@@ -5298,7 +5122,7 @@
           </a:p>
           <a:p>
             <a:pPr algn="l"/>
-            <a:endParaRPr lang="en-US" altLang="ko-KR" sz="800" dirty="0">
+            <a:endParaRPr lang="en-US" altLang="ko-KR" sz="800">
               <a:solidFill>
                 <a:schemeClr val="bg1"/>
               </a:solidFill>
@@ -5308,12 +5132,120 @@
           </a:p>
           <a:p>
             <a:pPr algn="l"/>
-            <a:endParaRPr lang="en-US" altLang="ko-KR" sz="2400" dirty="0">
+            <a:r>
+              <a:rPr lang="en-US" altLang="ko-KR">
+                <a:solidFill>
+                  <a:schemeClr val="bg1"/>
+                </a:solidFill>
+                <a:latin typeface="G마켓 산스 TTF Light" panose="02000000000000000000" pitchFamily="2" charset="-127"/>
+                <a:ea typeface="G마켓 산스 TTF Light" panose="02000000000000000000" pitchFamily="2" charset="-127"/>
+              </a:rPr>
+              <a:t>3D </a:t>
+            </a:r>
+            <a:r>
+              <a:rPr lang="ko-KR" altLang="en-US">
+                <a:solidFill>
+                  <a:schemeClr val="bg1"/>
+                </a:solidFill>
+                <a:latin typeface="G마켓 산스 TTF Light" panose="02000000000000000000" pitchFamily="2" charset="-127"/>
+                <a:ea typeface="G마켓 산스 TTF Light" panose="02000000000000000000" pitchFamily="2" charset="-127"/>
+              </a:rPr>
+              <a:t>에셋 및 </a:t>
+            </a:r>
+            <a:r>
+              <a:rPr lang="en-US" altLang="ko-KR">
+                <a:solidFill>
+                  <a:schemeClr val="bg1"/>
+                </a:solidFill>
+                <a:latin typeface="G마켓 산스 TTF Light" panose="02000000000000000000" pitchFamily="2" charset="-127"/>
+                <a:ea typeface="G마켓 산스 TTF Light" panose="02000000000000000000" pitchFamily="2" charset="-127"/>
+              </a:rPr>
+              <a:t>UI</a:t>
+            </a:r>
+            <a:r>
+              <a:rPr lang="ko-KR" altLang="en-US">
+                <a:solidFill>
+                  <a:schemeClr val="bg1"/>
+                </a:solidFill>
+                <a:latin typeface="G마켓 산스 TTF Light" panose="02000000000000000000" pitchFamily="2" charset="-127"/>
+                <a:ea typeface="G마켓 산스 TTF Light" panose="02000000000000000000" pitchFamily="2" charset="-127"/>
+              </a:rPr>
+              <a:t> 제작</a:t>
+            </a:r>
+            <a:endParaRPr lang="en-US" altLang="ko-KR">
               <a:solidFill>
                 <a:schemeClr val="bg1"/>
               </a:solidFill>
               <a:latin typeface="G마켓 산스 TTF Light" panose="02000000000000000000" pitchFamily="2" charset="-127"/>
               <a:ea typeface="G마켓 산스 TTF Light" panose="02000000000000000000" pitchFamily="2" charset="-127"/>
+            </a:endParaRPr>
+          </a:p>
+          <a:p>
+            <a:pPr algn="l"/>
+            <a:endParaRPr lang="en-US" altLang="ko-KR">
+              <a:solidFill>
+                <a:schemeClr val="bg1"/>
+              </a:solidFill>
+              <a:latin typeface="G마켓 산스 TTF Light" panose="02000000000000000000" pitchFamily="2" charset="-127"/>
+              <a:ea typeface="G마켓 산스 TTF Light" panose="02000000000000000000" pitchFamily="2" charset="-127"/>
+            </a:endParaRPr>
+          </a:p>
+          <a:p>
+            <a:pPr algn="l"/>
+            <a:endParaRPr lang="en-US" altLang="ko-KR">
+              <a:solidFill>
+                <a:schemeClr val="bg1"/>
+              </a:solidFill>
+              <a:latin typeface="G마켓 산스 TTF Light" panose="02000000000000000000" pitchFamily="2" charset="-127"/>
+              <a:ea typeface="G마켓 산스 TTF Light" panose="02000000000000000000" pitchFamily="2" charset="-127"/>
+            </a:endParaRPr>
+          </a:p>
+          <a:p>
+            <a:pPr algn="l"/>
+            <a:endParaRPr lang="en-US" altLang="ko-KR">
+              <a:solidFill>
+                <a:schemeClr val="bg1"/>
+              </a:solidFill>
+              <a:latin typeface="G마켓 산스 TTF Light" panose="02000000000000000000" pitchFamily="2" charset="-127"/>
+              <a:ea typeface="G마켓 산스 TTF Light" panose="02000000000000000000" pitchFamily="2" charset="-127"/>
+            </a:endParaRPr>
+          </a:p>
+          <a:p>
+            <a:r>
+              <a:rPr lang="ko-KR" altLang="en-US">
+                <a:solidFill>
+                  <a:schemeClr val="bg1"/>
+                </a:solidFill>
+                <a:latin typeface="G마켓 산스 TTF Medium" panose="02000000000000000000" pitchFamily="2" charset="-127"/>
+                <a:ea typeface="G마켓 산스 TTF Medium" panose="02000000000000000000" pitchFamily="2" charset="-127"/>
+              </a:rPr>
+              <a:t>자연스러운 재질 변환 이펙트</a:t>
+            </a:r>
+            <a:endParaRPr lang="en-US" altLang="ko-KR">
+              <a:solidFill>
+                <a:schemeClr val="bg1"/>
+              </a:solidFill>
+              <a:latin typeface="G마켓 산스 TTF Medium" panose="02000000000000000000" pitchFamily="2" charset="-127"/>
+              <a:ea typeface="G마켓 산스 TTF Light" panose="02000000000000000000" pitchFamily="2" charset="-127"/>
+            </a:endParaRPr>
+          </a:p>
+          <a:p>
+            <a:r>
+              <a:rPr lang="ko-KR" altLang="en-US">
+                <a:solidFill>
+                  <a:schemeClr val="bg1"/>
+                </a:solidFill>
+                <a:latin typeface="G마켓 산스 TTF Medium" panose="02000000000000000000" pitchFamily="2" charset="-127"/>
+                <a:ea typeface="G마켓 산스 TTF Medium" panose="02000000000000000000" pitchFamily="2" charset="-127"/>
+              </a:rPr>
+              <a:t>게임 시스템의 시각적 표현</a:t>
+            </a:r>
+            <a:endParaRPr lang="en-US" altLang="ko-KR">
+              <a:solidFill>
+                <a:schemeClr val="bg1"/>
+              </a:solidFill>
+              <a:latin typeface="G마켓 산스 TTF Medium" panose="02000000000000000000" pitchFamily="2" charset="-127"/>
+              <a:ea typeface="G마켓 산스 TTF Medium" panose="02000000000000000000" pitchFamily="2" charset="-127"/>
             </a:endParaRPr>
           </a:p>
         </p:txBody>
@@ -5332,8 +5264,8 @@
         </p:nvSpPr>
         <p:spPr>
           <a:xfrm>
-            <a:off x="6095999" y="1763415"/>
-            <a:ext cx="5142271" cy="738664"/>
+            <a:off x="7741032" y="1766324"/>
+            <a:ext cx="3349913" cy="2646878"/>
           </a:xfrm>
           <a:prstGeom prst="rect">
             <a:avLst/>
@@ -5366,7 +5298,207 @@
             </a:endParaRPr>
           </a:p>
           <a:p>
-            <a:endParaRPr lang="en-US" altLang="ko-KR" sz="1000" dirty="0">
+            <a:endParaRPr lang="en-US" altLang="ko-KR" sz="800">
+              <a:solidFill>
+                <a:schemeClr val="bg1"/>
+              </a:solidFill>
+              <a:latin typeface="G마켓 산스 TTF Light" panose="02000000000000000000" pitchFamily="2" charset="-127"/>
+              <a:ea typeface="G마켓 산스 TTF Light" panose="02000000000000000000" pitchFamily="2" charset="-127"/>
+            </a:endParaRPr>
+          </a:p>
+          <a:p>
+            <a:r>
+              <a:rPr lang="ko-KR" altLang="en-US">
+                <a:solidFill>
+                  <a:schemeClr val="bg1"/>
+                </a:solidFill>
+                <a:latin typeface="G마켓 산스 TTF Light" panose="02000000000000000000" pitchFamily="2" charset="-127"/>
+                <a:ea typeface="G마켓 산스 TTF Light" panose="02000000000000000000" pitchFamily="2" charset="-127"/>
+              </a:rPr>
+              <a:t>게임 시스템 구현</a:t>
+            </a:r>
+            <a:endParaRPr lang="en-US" altLang="ko-KR">
+              <a:solidFill>
+                <a:schemeClr val="bg1"/>
+              </a:solidFill>
+              <a:latin typeface="G마켓 산스 TTF Light" panose="02000000000000000000" pitchFamily="2" charset="-127"/>
+              <a:ea typeface="G마켓 산스 TTF Light" panose="02000000000000000000" pitchFamily="2" charset="-127"/>
+            </a:endParaRPr>
+          </a:p>
+          <a:p>
+            <a:endParaRPr lang="en-US" altLang="ko-KR">
+              <a:solidFill>
+                <a:schemeClr val="bg1"/>
+              </a:solidFill>
+              <a:latin typeface="G마켓 산스 TTF Light" panose="02000000000000000000" pitchFamily="2" charset="-127"/>
+              <a:ea typeface="G마켓 산스 TTF Light" panose="02000000000000000000" pitchFamily="2" charset="-127"/>
+            </a:endParaRPr>
+          </a:p>
+          <a:p>
+            <a:endParaRPr lang="en-US" altLang="ko-KR">
+              <a:solidFill>
+                <a:schemeClr val="bg1"/>
+              </a:solidFill>
+              <a:latin typeface="G마켓 산스 TTF Light" panose="02000000000000000000" pitchFamily="2" charset="-127"/>
+              <a:ea typeface="G마켓 산스 TTF Light" panose="02000000000000000000" pitchFamily="2" charset="-127"/>
+            </a:endParaRPr>
+          </a:p>
+          <a:p>
+            <a:endParaRPr lang="en-US" altLang="ko-KR">
+              <a:solidFill>
+                <a:schemeClr val="bg1"/>
+              </a:solidFill>
+              <a:latin typeface="G마켓 산스 TTF Light" panose="02000000000000000000" pitchFamily="2" charset="-127"/>
+              <a:ea typeface="G마켓 산스 TTF Light" panose="02000000000000000000" pitchFamily="2" charset="-127"/>
+            </a:endParaRPr>
+          </a:p>
+          <a:p>
+            <a:endParaRPr lang="en-US" altLang="ko-KR">
+              <a:solidFill>
+                <a:schemeClr val="bg1"/>
+              </a:solidFill>
+              <a:latin typeface="G마켓 산스 TTF Light" panose="02000000000000000000" pitchFamily="2" charset="-127"/>
+              <a:ea typeface="G마켓 산스 TTF Light" panose="02000000000000000000" pitchFamily="2" charset="-127"/>
+            </a:endParaRPr>
+          </a:p>
+          <a:p>
+            <a:r>
+              <a:rPr lang="en-US" altLang="ko-KR">
+                <a:solidFill>
+                  <a:schemeClr val="bg1"/>
+                </a:solidFill>
+                <a:latin typeface="G마켓 산스 TTF Light" panose="02000000000000000000" pitchFamily="2" charset="-127"/>
+                <a:ea typeface="G마켓 산스 TTF Light" panose="02000000000000000000" pitchFamily="2" charset="-127"/>
+              </a:rPr>
+              <a:t>C++ </a:t>
+            </a:r>
+            <a:r>
+              <a:rPr lang="ko-KR" altLang="en-US">
+                <a:solidFill>
+                  <a:schemeClr val="bg1"/>
+                </a:solidFill>
+                <a:latin typeface="G마켓 산스 TTF Light" panose="02000000000000000000" pitchFamily="2" charset="-127"/>
+                <a:ea typeface="G마켓 산스 TTF Light" panose="02000000000000000000" pitchFamily="2" charset="-127"/>
+              </a:rPr>
+              <a:t>기반 통합 물리 구조 설계</a:t>
+            </a:r>
+            <a:endParaRPr lang="en-US" altLang="ko-KR">
+              <a:solidFill>
+                <a:schemeClr val="bg1"/>
+              </a:solidFill>
+              <a:latin typeface="G마켓 산스 TTF Light" panose="02000000000000000000" pitchFamily="2" charset="-127"/>
+              <a:ea typeface="G마켓 산스 TTF Light" panose="02000000000000000000" pitchFamily="2" charset="-127"/>
+            </a:endParaRPr>
+          </a:p>
+          <a:p>
+            <a:r>
+              <a:rPr lang="ko-KR" altLang="en-US">
+                <a:solidFill>
+                  <a:schemeClr val="bg1"/>
+                </a:solidFill>
+                <a:latin typeface="G마켓 산스 TTF Medium" panose="02000000000000000000" pitchFamily="2" charset="-127"/>
+                <a:ea typeface="G마켓 산스 TTF Medium" panose="02000000000000000000" pitchFamily="2" charset="-127"/>
+              </a:rPr>
+              <a:t>실시간 물리 파라미터 최적화</a:t>
+            </a:r>
+            <a:endParaRPr lang="en-US" altLang="ko-KR">
+              <a:solidFill>
+                <a:schemeClr val="bg1"/>
+              </a:solidFill>
+              <a:latin typeface="G마켓 산스 TTF Medium" panose="02000000000000000000" pitchFamily="2" charset="-127"/>
+              <a:ea typeface="G마켓 산스 TTF Medium" panose="02000000000000000000" pitchFamily="2" charset="-127"/>
+            </a:endParaRPr>
+          </a:p>
+        </p:txBody>
+      </p:sp>
+      <p:sp>
+        <p:nvSpPr>
+          <p:cNvPr id="3" name="TextBox 2">
+            <a:extLst>
+              <a:ext uri="{FF2B5EF4-FFF2-40B4-BE49-F238E27FC236}">
+                <a16:creationId xmlns:a16="http://schemas.microsoft.com/office/drawing/2014/main" id="{5D66EFB3-FD0B-FD83-4711-1032EF7B8EB3}"/>
+              </a:ext>
+            </a:extLst>
+          </p:cNvPr>
+          <p:cNvSpPr txBox="1"/>
+          <p:nvPr/>
+        </p:nvSpPr>
+        <p:spPr>
+          <a:xfrm>
+            <a:off x="4391119" y="1690688"/>
+            <a:ext cx="3349913" cy="1261884"/>
+          </a:xfrm>
+          <a:prstGeom prst="rect">
+            <a:avLst/>
+          </a:prstGeom>
+          <a:noFill/>
+        </p:spPr>
+        <p:txBody>
+          <a:bodyPr wrap="square" rtlCol="0">
+            <a:spAutoFit/>
+          </a:bodyPr>
+          <a:lstStyle/>
+          <a:p>
+            <a:pPr algn="l"/>
+            <a:r>
+              <a:rPr lang="ko-KR" altLang="en-US" sz="3200">
+                <a:solidFill>
+                  <a:schemeClr val="bg1"/>
+                </a:solidFill>
+                <a:latin typeface="G마켓 산스 TTF Medium" panose="02000000000000000000" pitchFamily="2" charset="-127"/>
+                <a:ea typeface="G마켓 산스 TTF Medium" panose="02000000000000000000" pitchFamily="2" charset="-127"/>
+              </a:rPr>
+              <a:t>공동</a:t>
+            </a:r>
+            <a:endParaRPr lang="en-US" altLang="ko-KR" sz="3200">
+              <a:solidFill>
+                <a:schemeClr val="bg1"/>
+              </a:solidFill>
+              <a:latin typeface="G마켓 산스 TTF Medium" panose="02000000000000000000" pitchFamily="2" charset="-127"/>
+              <a:ea typeface="G마켓 산스 TTF Medium" panose="02000000000000000000" pitchFamily="2" charset="-127"/>
+            </a:endParaRPr>
+          </a:p>
+          <a:p>
+            <a:pPr algn="l"/>
+            <a:endParaRPr lang="ko-KR" altLang="en-US" sz="800">
+              <a:solidFill>
+                <a:schemeClr val="bg1"/>
+              </a:solidFill>
+              <a:latin typeface="G마켓 산스 TTF Medium" panose="02000000000000000000" pitchFamily="2" charset="-127"/>
+              <a:ea typeface="G마켓 산스 TTF Medium" panose="02000000000000000000" pitchFamily="2" charset="-127"/>
+            </a:endParaRPr>
+          </a:p>
+          <a:p>
+            <a:r>
+              <a:rPr lang="ko-KR" altLang="en-US">
+                <a:solidFill>
+                  <a:schemeClr val="bg1"/>
+                </a:solidFill>
+                <a:latin typeface="G마켓 산스 TTF Light" panose="02000000000000000000" pitchFamily="2" charset="-127"/>
+                <a:ea typeface="G마켓 산스 TTF Light" panose="02000000000000000000" pitchFamily="2" charset="-127"/>
+              </a:rPr>
+              <a:t>레벨 디자인</a:t>
+            </a:r>
+            <a:endParaRPr lang="en-US" altLang="ko-KR">
+              <a:solidFill>
+                <a:schemeClr val="bg1"/>
+              </a:solidFill>
+              <a:latin typeface="G마켓 산스 TTF Light" panose="02000000000000000000" pitchFamily="2" charset="-127"/>
+              <a:ea typeface="G마켓 산스 TTF Light" panose="02000000000000000000" pitchFamily="2" charset="-127"/>
+            </a:endParaRPr>
+          </a:p>
+          <a:p>
+            <a:r>
+              <a:rPr lang="ko-KR" altLang="en-US">
+                <a:solidFill>
+                  <a:schemeClr val="bg1"/>
+                </a:solidFill>
+                <a:latin typeface="G마켓 산스 TTF Light" panose="02000000000000000000" pitchFamily="2" charset="-127"/>
+                <a:ea typeface="G마켓 산스 TTF Light" panose="02000000000000000000" pitchFamily="2" charset="-127"/>
+              </a:rPr>
+              <a:t>물리 파라미터의 시각적 표현</a:t>
+            </a:r>
+            <a:endParaRPr lang="en-US" altLang="ko-KR">
               <a:solidFill>
                 <a:schemeClr val="bg1"/>
               </a:solidFill>
@@ -5397,7 +5529,7 @@
         <p:cNvPr id="1" name="">
           <a:extLst>
             <a:ext uri="{FF2B5EF4-FFF2-40B4-BE49-F238E27FC236}">
-              <a16:creationId xmlns:a16="http://schemas.microsoft.com/office/drawing/2014/main" id="{F21577CB-7BC7-C87C-DA3A-A8079E2E5DDC}"/>
+              <a16:creationId xmlns:a16="http://schemas.microsoft.com/office/drawing/2014/main" id="{E127A2E3-E9A3-6CE2-7FE9-4485540707BA}"/>
             </a:ext>
           </a:extLst>
         </p:cNvPr>
@@ -5414,10 +5546,10 @@
       </p:grpSpPr>
       <p:pic>
         <p:nvPicPr>
-          <p:cNvPr id="3" name="그림 2">
+          <p:cNvPr id="4" name="그림 3">
             <a:extLst>
               <a:ext uri="{FF2B5EF4-FFF2-40B4-BE49-F238E27FC236}">
-                <a16:creationId xmlns:a16="http://schemas.microsoft.com/office/drawing/2014/main" id="{588ECAEC-9CFC-088C-398B-BEDD1E3BBEF5}"/>
+                <a16:creationId xmlns:a16="http://schemas.microsoft.com/office/drawing/2014/main" id="{48D17C0F-B731-24D2-12E9-F6DDA61EEE40}"/>
               </a:ext>
             </a:extLst>
           </p:cNvPr>
@@ -5450,10 +5582,10 @@
       </p:pic>
       <p:sp>
         <p:nvSpPr>
-          <p:cNvPr id="4" name="직사각형 3">
+          <p:cNvPr id="5" name="직사각형 4">
             <a:extLst>
               <a:ext uri="{FF2B5EF4-FFF2-40B4-BE49-F238E27FC236}">
-                <a16:creationId xmlns:a16="http://schemas.microsoft.com/office/drawing/2014/main" id="{D836CF77-5FB8-DF0F-DD70-05FB9C345633}"/>
+                <a16:creationId xmlns:a16="http://schemas.microsoft.com/office/drawing/2014/main" id="{7E747A12-8E20-7D30-0608-D3A1F958FA33}"/>
               </a:ext>
             </a:extLst>
           </p:cNvPr>
@@ -5510,10 +5642,10 @@
       </p:sp>
       <p:cxnSp>
         <p:nvCxnSpPr>
-          <p:cNvPr id="5" name="직선 연결선 4">
+          <p:cNvPr id="6" name="직선 연결선 5">
             <a:extLst>
               <a:ext uri="{FF2B5EF4-FFF2-40B4-BE49-F238E27FC236}">
-                <a16:creationId xmlns:a16="http://schemas.microsoft.com/office/drawing/2014/main" id="{F1E29FCC-5C40-1529-B433-A07681A92CD4}"/>
+                <a16:creationId xmlns:a16="http://schemas.microsoft.com/office/drawing/2014/main" id="{552B4293-352A-5FD8-32D7-0752F7D37D8A}"/>
               </a:ext>
             </a:extLst>
           </p:cNvPr>
@@ -5555,7 +5687,7 @@
           <p:cNvPr id="2" name="제목 1">
             <a:extLst>
               <a:ext uri="{FF2B5EF4-FFF2-40B4-BE49-F238E27FC236}">
-                <a16:creationId xmlns:a16="http://schemas.microsoft.com/office/drawing/2014/main" id="{B32D9DB9-6497-1A21-2834-CDC610AE896E}"/>
+                <a16:creationId xmlns:a16="http://schemas.microsoft.com/office/drawing/2014/main" id="{6F6507EE-FBD0-CEE9-0222-75F3E8799AE3}"/>
               </a:ext>
             </a:extLst>
           </p:cNvPr>
@@ -5574,24 +5706,81 @@
           <a:lstStyle/>
           <a:p>
             <a:r>
-              <a:rPr lang="ko-KR" altLang="en-US" sz="4800" dirty="0">
+              <a:rPr lang="ko-KR" altLang="en-US" sz="4800">
                 <a:solidFill>
                   <a:schemeClr val="bg1"/>
                 </a:solidFill>
                 <a:latin typeface="G마켓 산스 TTF Bold" panose="02000000000000000000" pitchFamily="2" charset="-127"/>
                 <a:ea typeface="G마켓 산스 TTF Bold" panose="02000000000000000000" pitchFamily="2" charset="-127"/>
               </a:rPr>
-              <a:t>중점 연구 분야</a:t>
-            </a:r>
+              <a:t>개발 내용 </a:t>
+            </a:r>
+            <a:r>
+              <a:rPr lang="en-US" altLang="ko-KR" sz="4800">
+                <a:solidFill>
+                  <a:schemeClr val="bg1"/>
+                </a:solidFill>
+                <a:latin typeface="G마켓 산스 TTF Bold" panose="02000000000000000000" pitchFamily="2" charset="-127"/>
+                <a:ea typeface="G마켓 산스 TTF Bold" panose="02000000000000000000" pitchFamily="2" charset="-127"/>
+              </a:rPr>
+              <a:t>– </a:t>
+            </a:r>
+            <a:r>
+              <a:rPr lang="ko-KR" altLang="en-US" sz="4800">
+                <a:solidFill>
+                  <a:schemeClr val="bg1"/>
+                </a:solidFill>
+                <a:latin typeface="G마켓 산스 TTF Bold" panose="02000000000000000000" pitchFamily="2" charset="-127"/>
+                <a:ea typeface="G마켓 산스 TTF Bold" panose="02000000000000000000" pitchFamily="2" charset="-127"/>
+              </a:rPr>
+              <a:t>게임 시스템</a:t>
+            </a:r>
+            <a:endParaRPr lang="ko-KR" altLang="en-US" sz="4800" dirty="0">
+              <a:solidFill>
+                <a:schemeClr val="bg1"/>
+              </a:solidFill>
+              <a:latin typeface="G마켓 산스 TTF Bold" panose="02000000000000000000" pitchFamily="2" charset="-127"/>
+              <a:ea typeface="G마켓 산스 TTF Bold" panose="02000000000000000000" pitchFamily="2" charset="-127"/>
+            </a:endParaRPr>
           </a:p>
         </p:txBody>
       </p:sp>
+      <p:pic>
+        <p:nvPicPr>
+          <p:cNvPr id="7" name="그림 6">
+            <a:extLst>
+              <a:ext uri="{FF2B5EF4-FFF2-40B4-BE49-F238E27FC236}">
+                <a16:creationId xmlns:a16="http://schemas.microsoft.com/office/drawing/2014/main" id="{6D39AEF8-60BA-89AF-6BCF-C60908623DED}"/>
+              </a:ext>
+            </a:extLst>
+          </p:cNvPr>
+          <p:cNvPicPr>
+            <a:picLocks noChangeAspect="1"/>
+          </p:cNvPicPr>
+          <p:nvPr/>
+        </p:nvPicPr>
+        <p:blipFill>
+          <a:blip r:embed="rId3"/>
+          <a:stretch>
+            <a:fillRect/>
+          </a:stretch>
+        </p:blipFill>
+        <p:spPr>
+          <a:xfrm>
+            <a:off x="4247205" y="4018445"/>
+            <a:ext cx="3697589" cy="1938767"/>
+          </a:xfrm>
+          <a:prstGeom prst="rect">
+            <a:avLst/>
+          </a:prstGeom>
+        </p:spPr>
+      </p:pic>
       <p:sp>
         <p:nvSpPr>
-          <p:cNvPr id="10" name="TextBox 9">
+          <p:cNvPr id="8" name="TextBox 7">
             <a:extLst>
               <a:ext uri="{FF2B5EF4-FFF2-40B4-BE49-F238E27FC236}">
-                <a16:creationId xmlns:a16="http://schemas.microsoft.com/office/drawing/2014/main" id="{05BB2EAA-2840-CBD0-D63A-7E5456973EAB}"/>
+                <a16:creationId xmlns:a16="http://schemas.microsoft.com/office/drawing/2014/main" id="{FE814D5E-00F1-04A7-9FE6-CF9E108A5386}"/>
               </a:ext>
             </a:extLst>
           </p:cNvPr>
@@ -5600,334 +5789,8 @@
         </p:nvSpPr>
         <p:spPr>
           <a:xfrm>
-            <a:off x="1297871" y="2690336"/>
-            <a:ext cx="4119707" cy="1292662"/>
-          </a:xfrm>
-          <a:prstGeom prst="rect">
-            <a:avLst/>
-          </a:prstGeom>
-          <a:noFill/>
-        </p:spPr>
-        <p:txBody>
-          <a:bodyPr wrap="square">
-            <a:spAutoFit/>
-          </a:bodyPr>
-          <a:lstStyle/>
-          <a:p>
-            <a:pPr algn="ctr"/>
-            <a:r>
-              <a:rPr lang="ko-KR" altLang="en-US" sz="2400" dirty="0">
-                <a:solidFill>
-                  <a:schemeClr val="bg1"/>
-                </a:solidFill>
-                <a:latin typeface="G마켓 산스 TTF Medium" panose="02000000000000000000" pitchFamily="2" charset="-127"/>
-                <a:ea typeface="G마켓 산스 TTF Medium" panose="02000000000000000000" pitchFamily="2" charset="-127"/>
-              </a:rPr>
-              <a:t>실시간 재질 변환 그래픽 구현</a:t>
-            </a:r>
-            <a:endParaRPr lang="en-US" altLang="ko-KR" sz="2400" dirty="0">
-              <a:solidFill>
-                <a:schemeClr val="bg1"/>
-              </a:solidFill>
-              <a:latin typeface="G마켓 산스 TTF Medium" panose="02000000000000000000" pitchFamily="2" charset="-127"/>
-              <a:ea typeface="G마켓 산스 TTF Medium" panose="02000000000000000000" pitchFamily="2" charset="-127"/>
-            </a:endParaRPr>
-          </a:p>
-          <a:p>
-            <a:pPr algn="ctr"/>
-            <a:r>
-              <a:rPr lang="ko-KR" altLang="en-US" dirty="0">
-                <a:solidFill>
-                  <a:schemeClr val="bg1"/>
-                </a:solidFill>
-                <a:latin typeface="G마켓 산스 TTF Light" panose="02000000000000000000" pitchFamily="2" charset="-127"/>
-                <a:ea typeface="G마켓 산스 TTF Light" panose="02000000000000000000" pitchFamily="2" charset="-127"/>
-              </a:rPr>
-              <a:t>런타임에 오브젝트의 </a:t>
-            </a:r>
-            <a:r>
-              <a:rPr lang="ko-KR" altLang="en-US" dirty="0" err="1">
-                <a:solidFill>
-                  <a:schemeClr val="bg1"/>
-                </a:solidFill>
-                <a:latin typeface="G마켓 산스 TTF Light" panose="02000000000000000000" pitchFamily="2" charset="-127"/>
-                <a:ea typeface="G마켓 산스 TTF Light" panose="02000000000000000000" pitchFamily="2" charset="-127"/>
-              </a:rPr>
-              <a:t>머티리얼이</a:t>
-            </a:r>
-            <a:endParaRPr lang="en-US" altLang="ko-KR" dirty="0">
-              <a:solidFill>
-                <a:schemeClr val="bg1"/>
-              </a:solidFill>
-              <a:latin typeface="G마켓 산스 TTF Light" panose="02000000000000000000" pitchFamily="2" charset="-127"/>
-              <a:ea typeface="G마켓 산스 TTF Light" panose="02000000000000000000" pitchFamily="2" charset="-127"/>
-            </a:endParaRPr>
-          </a:p>
-          <a:p>
-            <a:pPr algn="ctr"/>
-            <a:r>
-              <a:rPr lang="ko-KR" altLang="en-US" dirty="0">
-                <a:solidFill>
-                  <a:schemeClr val="bg1"/>
-                </a:solidFill>
-                <a:latin typeface="G마켓 산스 TTF Light" panose="02000000000000000000" pitchFamily="2" charset="-127"/>
-                <a:ea typeface="G마켓 산스 TTF Light" panose="02000000000000000000" pitchFamily="2" charset="-127"/>
-              </a:rPr>
-              <a:t>자연스럽게 변경되는</a:t>
-            </a:r>
-            <a:endParaRPr lang="en-US" altLang="ko-KR" dirty="0">
-              <a:solidFill>
-                <a:schemeClr val="bg1"/>
-              </a:solidFill>
-              <a:latin typeface="G마켓 산스 TTF Light" panose="02000000000000000000" pitchFamily="2" charset="-127"/>
-              <a:ea typeface="G마켓 산스 TTF Light" panose="02000000000000000000" pitchFamily="2" charset="-127"/>
-            </a:endParaRPr>
-          </a:p>
-          <a:p>
-            <a:pPr algn="ctr"/>
-            <a:r>
-              <a:rPr lang="ko-KR" altLang="en-US" dirty="0">
-                <a:solidFill>
-                  <a:schemeClr val="bg1"/>
-                </a:solidFill>
-                <a:latin typeface="G마켓 산스 TTF Light" panose="02000000000000000000" pitchFamily="2" charset="-127"/>
-                <a:ea typeface="G마켓 산스 TTF Light" panose="02000000000000000000" pitchFamily="2" charset="-127"/>
-              </a:rPr>
-              <a:t>나이아가라 이펙트 제작</a:t>
-            </a:r>
-          </a:p>
-        </p:txBody>
-      </p:sp>
-      <p:sp>
-        <p:nvSpPr>
-          <p:cNvPr id="12" name="TextBox 11">
-            <a:extLst>
-              <a:ext uri="{FF2B5EF4-FFF2-40B4-BE49-F238E27FC236}">
-                <a16:creationId xmlns:a16="http://schemas.microsoft.com/office/drawing/2014/main" id="{87CC6EE8-0758-CB9F-0ACF-53FFB1D63C8E}"/>
-              </a:ext>
-            </a:extLst>
-          </p:cNvPr>
-          <p:cNvSpPr txBox="1"/>
-          <p:nvPr/>
-        </p:nvSpPr>
-        <p:spPr>
-          <a:xfrm>
-            <a:off x="6024701" y="2690336"/>
-            <a:ext cx="4869428" cy="1015663"/>
-          </a:xfrm>
-          <a:prstGeom prst="rect">
-            <a:avLst/>
-          </a:prstGeom>
-          <a:noFill/>
-        </p:spPr>
-        <p:txBody>
-          <a:bodyPr wrap="square">
-            <a:spAutoFit/>
-          </a:bodyPr>
-          <a:lstStyle/>
-          <a:p>
-            <a:pPr algn="ctr"/>
-            <a:r>
-              <a:rPr lang="en-US" altLang="ko-KR" sz="2400" dirty="0">
-                <a:solidFill>
-                  <a:schemeClr val="bg1"/>
-                </a:solidFill>
-                <a:latin typeface="G마켓 산스 TTF Medium" panose="02000000000000000000" pitchFamily="2" charset="-127"/>
-                <a:ea typeface="G마켓 산스 TTF Medium" panose="02000000000000000000" pitchFamily="2" charset="-127"/>
-              </a:rPr>
-              <a:t>C++ </a:t>
-            </a:r>
-            <a:r>
-              <a:rPr lang="ko-KR" altLang="en-US" sz="2400" dirty="0">
-                <a:solidFill>
-                  <a:schemeClr val="bg1"/>
-                </a:solidFill>
-                <a:latin typeface="G마켓 산스 TTF Medium" panose="02000000000000000000" pitchFamily="2" charset="-127"/>
-                <a:ea typeface="G마켓 산스 TTF Medium" panose="02000000000000000000" pitchFamily="2" charset="-127"/>
-              </a:rPr>
-              <a:t>기반 통합 물리 아키텍처 구축</a:t>
-            </a:r>
-            <a:endParaRPr lang="en-US" altLang="ko-KR" sz="2400" dirty="0">
-              <a:solidFill>
-                <a:schemeClr val="bg1"/>
-              </a:solidFill>
-              <a:latin typeface="G마켓 산스 TTF Medium" panose="02000000000000000000" pitchFamily="2" charset="-127"/>
-              <a:ea typeface="G마켓 산스 TTF Medium" panose="02000000000000000000" pitchFamily="2" charset="-127"/>
-            </a:endParaRPr>
-          </a:p>
-          <a:p>
-            <a:pPr algn="ctr"/>
-            <a:r>
-              <a:rPr lang="ko-KR" altLang="en-US" dirty="0">
-                <a:solidFill>
-                  <a:schemeClr val="bg1"/>
-                </a:solidFill>
-                <a:latin typeface="G마켓 산스 TTF Light" panose="02000000000000000000" pitchFamily="2" charset="-127"/>
-                <a:ea typeface="G마켓 산스 TTF Light" panose="02000000000000000000" pitchFamily="2" charset="-127"/>
-              </a:rPr>
-              <a:t>열역학 및 전자기학</a:t>
-            </a:r>
-            <a:r>
-              <a:rPr lang="en-US" altLang="ko-KR" dirty="0">
-                <a:solidFill>
-                  <a:schemeClr val="bg1"/>
-                </a:solidFill>
-                <a:latin typeface="G마켓 산스 TTF Light" panose="02000000000000000000" pitchFamily="2" charset="-127"/>
-                <a:ea typeface="G마켓 산스 TTF Light" panose="02000000000000000000" pitchFamily="2" charset="-127"/>
-              </a:rPr>
-              <a:t> </a:t>
-            </a:r>
-            <a:r>
-              <a:rPr lang="ko-KR" altLang="en-US" dirty="0">
-                <a:solidFill>
-                  <a:schemeClr val="bg1"/>
-                </a:solidFill>
-                <a:latin typeface="G마켓 산스 TTF Light" panose="02000000000000000000" pitchFamily="2" charset="-127"/>
-                <a:ea typeface="G마켓 산스 TTF Light" panose="02000000000000000000" pitchFamily="2" charset="-127"/>
-              </a:rPr>
-              <a:t>등이 서로 영향을 미치는</a:t>
-            </a:r>
-            <a:endParaRPr lang="en-US" altLang="ko-KR" dirty="0">
-              <a:solidFill>
-                <a:schemeClr val="bg1"/>
-              </a:solidFill>
-              <a:latin typeface="G마켓 산스 TTF Light" panose="02000000000000000000" pitchFamily="2" charset="-127"/>
-              <a:ea typeface="G마켓 산스 TTF Light" panose="02000000000000000000" pitchFamily="2" charset="-127"/>
-            </a:endParaRPr>
-          </a:p>
-          <a:p>
-            <a:pPr algn="ctr"/>
-            <a:r>
-              <a:rPr lang="ko-KR" altLang="en-US" dirty="0">
-                <a:solidFill>
-                  <a:schemeClr val="bg1"/>
-                </a:solidFill>
-                <a:latin typeface="G마켓 산스 TTF Light" panose="02000000000000000000" pitchFamily="2" charset="-127"/>
-                <a:ea typeface="G마켓 산스 TTF Light" panose="02000000000000000000" pitchFamily="2" charset="-127"/>
-              </a:rPr>
-              <a:t>독자적인 물리 엔진 시스템 직접 구현</a:t>
-            </a:r>
-          </a:p>
-        </p:txBody>
-      </p:sp>
-      <p:sp>
-        <p:nvSpPr>
-          <p:cNvPr id="14" name="TextBox 13">
-            <a:extLst>
-              <a:ext uri="{FF2B5EF4-FFF2-40B4-BE49-F238E27FC236}">
-                <a16:creationId xmlns:a16="http://schemas.microsoft.com/office/drawing/2014/main" id="{F0A43FDD-DFDF-77C1-B7A0-DA088A263D1F}"/>
-              </a:ext>
-            </a:extLst>
-          </p:cNvPr>
-          <p:cNvSpPr txBox="1"/>
-          <p:nvPr/>
-        </p:nvSpPr>
-        <p:spPr>
-          <a:xfrm>
-            <a:off x="5777511" y="4023658"/>
-            <a:ext cx="5363808" cy="1015663"/>
-          </a:xfrm>
-          <a:prstGeom prst="rect">
-            <a:avLst/>
-          </a:prstGeom>
-          <a:noFill/>
-        </p:spPr>
-        <p:txBody>
-          <a:bodyPr wrap="square">
-            <a:spAutoFit/>
-          </a:bodyPr>
-          <a:lstStyle/>
-          <a:p>
-            <a:pPr algn="ctr"/>
-            <a:r>
-              <a:rPr lang="ko-KR" altLang="en-US" sz="2400" dirty="0">
-                <a:solidFill>
-                  <a:schemeClr val="bg1"/>
-                </a:solidFill>
-                <a:latin typeface="G마켓 산스 TTF Medium" panose="02000000000000000000" pitchFamily="2" charset="-127"/>
-                <a:ea typeface="G마켓 산스 TTF Medium" panose="02000000000000000000" pitchFamily="2" charset="-127"/>
-              </a:rPr>
-              <a:t>실시간 상태 동기화 시스템</a:t>
-            </a:r>
-            <a:endParaRPr lang="en-US" altLang="ko-KR" sz="2400" dirty="0">
-              <a:solidFill>
-                <a:schemeClr val="bg1"/>
-              </a:solidFill>
-              <a:latin typeface="G마켓 산스 TTF Medium" panose="02000000000000000000" pitchFamily="2" charset="-127"/>
-              <a:ea typeface="G마켓 산스 TTF Medium" panose="02000000000000000000" pitchFamily="2" charset="-127"/>
-            </a:endParaRPr>
-          </a:p>
-          <a:p>
-            <a:pPr algn="ctr"/>
-            <a:r>
-              <a:rPr lang="ko-KR" altLang="en-US" dirty="0">
-                <a:solidFill>
-                  <a:schemeClr val="bg1"/>
-                </a:solidFill>
-                <a:latin typeface="G마켓 산스 TTF Light" panose="02000000000000000000" pitchFamily="2" charset="-127"/>
-                <a:ea typeface="G마켓 산스 TTF Light" panose="02000000000000000000" pitchFamily="2" charset="-127"/>
-              </a:rPr>
-              <a:t>오브젝트의 </a:t>
-            </a:r>
-            <a:r>
-              <a:rPr lang="ko-KR" altLang="en-US" dirty="0" err="1">
-                <a:solidFill>
-                  <a:schemeClr val="bg1"/>
-                </a:solidFill>
-                <a:latin typeface="G마켓 산스 TTF Light" panose="02000000000000000000" pitchFamily="2" charset="-127"/>
-                <a:ea typeface="G마켓 산스 TTF Light" panose="02000000000000000000" pitchFamily="2" charset="-127"/>
-              </a:rPr>
-              <a:t>머티리얼</a:t>
-            </a:r>
-            <a:r>
-              <a:rPr lang="ko-KR" altLang="en-US" dirty="0">
-                <a:solidFill>
-                  <a:schemeClr val="bg1"/>
-                </a:solidFill>
-                <a:latin typeface="G마켓 산스 TTF Light" panose="02000000000000000000" pitchFamily="2" charset="-127"/>
-                <a:ea typeface="G마켓 산스 TTF Light" panose="02000000000000000000" pitchFamily="2" charset="-127"/>
-              </a:rPr>
-              <a:t> 변경 즉시 타 오브젝트와</a:t>
-            </a:r>
-            <a:endParaRPr lang="en-US" altLang="ko-KR" dirty="0">
-              <a:solidFill>
-                <a:schemeClr val="bg1"/>
-              </a:solidFill>
-              <a:latin typeface="G마켓 산스 TTF Light" panose="02000000000000000000" pitchFamily="2" charset="-127"/>
-              <a:ea typeface="G마켓 산스 TTF Light" panose="02000000000000000000" pitchFamily="2" charset="-127"/>
-            </a:endParaRPr>
-          </a:p>
-          <a:p>
-            <a:pPr algn="ctr"/>
-            <a:r>
-              <a:rPr lang="ko-KR" altLang="en-US" dirty="0">
-                <a:solidFill>
-                  <a:schemeClr val="bg1"/>
-                </a:solidFill>
-                <a:latin typeface="G마켓 산스 TTF Light" panose="02000000000000000000" pitchFamily="2" charset="-127"/>
-                <a:ea typeface="G마켓 산스 TTF Light" panose="02000000000000000000" pitchFamily="2" charset="-127"/>
-              </a:rPr>
-              <a:t>자연스럽게 상호작용할 수 있도록 최적화</a:t>
-            </a:r>
-          </a:p>
-        </p:txBody>
-      </p:sp>
-      <p:sp>
-        <p:nvSpPr>
-          <p:cNvPr id="15" name="TextBox 14">
-            <a:extLst>
-              <a:ext uri="{FF2B5EF4-FFF2-40B4-BE49-F238E27FC236}">
-                <a16:creationId xmlns:a16="http://schemas.microsoft.com/office/drawing/2014/main" id="{EFAB7EDD-736B-A694-DB18-BF55FE2527ED}"/>
-              </a:ext>
-            </a:extLst>
-          </p:cNvPr>
-          <p:cNvSpPr txBox="1"/>
-          <p:nvPr/>
-        </p:nvSpPr>
-        <p:spPr>
-          <a:xfrm>
-            <a:off x="1769816" y="1971711"/>
-            <a:ext cx="3175820" cy="584775"/>
+            <a:off x="5087177" y="5957212"/>
+            <a:ext cx="2017644" cy="369332"/>
           </a:xfrm>
           <a:prstGeom prst="rect">
             <a:avLst/>
@@ -5942,16 +5805,16 @@
           <a:p>
             <a:pPr algn="ctr"/>
             <a:r>
-              <a:rPr lang="ko-KR" altLang="en-US" sz="3200">
+              <a:rPr lang="ko-KR" altLang="en-US">
                 <a:solidFill>
                   <a:schemeClr val="bg1"/>
                 </a:solidFill>
                 <a:latin typeface="G마켓 산스 TTF Medium" panose="02000000000000000000" pitchFamily="2" charset="-127"/>
                 <a:ea typeface="G마켓 산스 TTF Medium" panose="02000000000000000000" pitchFamily="2" charset="-127"/>
               </a:rPr>
-              <a:t>송형규</a:t>
-            </a:r>
-            <a:endParaRPr lang="ko-KR" altLang="en-US" sz="3200" dirty="0">
+              <a:t>자기장 시스템</a:t>
+            </a:r>
+            <a:endParaRPr lang="ko-KR" altLang="en-US" dirty="0" err="1">
               <a:solidFill>
                 <a:schemeClr val="bg1"/>
               </a:solidFill>
@@ -5961,55 +5824,12 @@
           </a:p>
         </p:txBody>
       </p:sp>
-      <p:cxnSp>
-        <p:nvCxnSpPr>
-          <p:cNvPr id="17" name="직선 연결선 16">
+      <p:sp>
+        <p:nvSpPr>
+          <p:cNvPr id="9" name="TextBox 8">
             <a:extLst>
               <a:ext uri="{FF2B5EF4-FFF2-40B4-BE49-F238E27FC236}">
-                <a16:creationId xmlns:a16="http://schemas.microsoft.com/office/drawing/2014/main" id="{E797A6C0-90B9-4BD1-3A19-88D4B1A966C0}"/>
-              </a:ext>
-            </a:extLst>
-          </p:cNvPr>
-          <p:cNvCxnSpPr/>
-          <p:nvPr/>
-        </p:nvCxnSpPr>
-        <p:spPr>
-          <a:xfrm>
-            <a:off x="2281093" y="2556486"/>
-            <a:ext cx="2153265" cy="0"/>
-          </a:xfrm>
-          <a:prstGeom prst="line">
-            <a:avLst/>
-          </a:prstGeom>
-          <a:ln>
-            <a:solidFill>
-              <a:schemeClr val="bg1"/>
-            </a:solidFill>
-            <a:headEnd type="none" w="med" len="med"/>
-            <a:tailEnd type="none" w="med" len="med"/>
-          </a:ln>
-        </p:spPr>
-        <p:style>
-          <a:lnRef idx="2">
-            <a:schemeClr val="accent1"/>
-          </a:lnRef>
-          <a:fillRef idx="0">
-            <a:schemeClr val="accent1"/>
-          </a:fillRef>
-          <a:effectRef idx="1">
-            <a:schemeClr val="accent1"/>
-          </a:effectRef>
-          <a:fontRef idx="minor">
-            <a:schemeClr val="tx1"/>
-          </a:fontRef>
-        </p:style>
-      </p:cxnSp>
-      <p:sp>
-        <p:nvSpPr>
-          <p:cNvPr id="18" name="TextBox 17">
-            <a:extLst>
-              <a:ext uri="{FF2B5EF4-FFF2-40B4-BE49-F238E27FC236}">
-                <a16:creationId xmlns:a16="http://schemas.microsoft.com/office/drawing/2014/main" id="{457EC123-31EE-3F11-7FB5-F566BF8C38AD}"/>
+                <a16:creationId xmlns:a16="http://schemas.microsoft.com/office/drawing/2014/main" id="{08BE1905-D2F5-2CEB-79E6-2FC9F084D7B3}"/>
               </a:ext>
             </a:extLst>
           </p:cNvPr>
@@ -6018,8 +5838,8 @@
         </p:nvSpPr>
         <p:spPr>
           <a:xfrm>
-            <a:off x="6715431" y="2014194"/>
-            <a:ext cx="3175820" cy="584775"/>
+            <a:off x="9059574" y="5587880"/>
+            <a:ext cx="2017644" cy="369332"/>
           </a:xfrm>
           <a:prstGeom prst="rect">
             <a:avLst/>
@@ -6034,65 +5854,108 @@
           <a:p>
             <a:pPr algn="ctr"/>
             <a:r>
-              <a:rPr lang="ko-KR" altLang="en-US" sz="3200" dirty="0">
+              <a:rPr lang="ko-KR" altLang="en-US">
                 <a:solidFill>
                   <a:schemeClr val="bg1"/>
                 </a:solidFill>
                 <a:latin typeface="G마켓 산스 TTF Medium" panose="02000000000000000000" pitchFamily="2" charset="-127"/>
                 <a:ea typeface="G마켓 산스 TTF Medium" panose="02000000000000000000" pitchFamily="2" charset="-127"/>
               </a:rPr>
-              <a:t>신성재</a:t>
-            </a:r>
+              <a:t>전기 시스템</a:t>
+            </a:r>
+            <a:endParaRPr lang="ko-KR" altLang="en-US" dirty="0" err="1">
+              <a:solidFill>
+                <a:schemeClr val="bg1"/>
+              </a:solidFill>
+              <a:latin typeface="G마켓 산스 TTF Medium" panose="02000000000000000000" pitchFamily="2" charset="-127"/>
+              <a:ea typeface="G마켓 산스 TTF Medium" panose="02000000000000000000" pitchFamily="2" charset="-127"/>
+            </a:endParaRPr>
           </a:p>
         </p:txBody>
       </p:sp>
-      <p:cxnSp>
-        <p:nvCxnSpPr>
-          <p:cNvPr id="19" name="직선 연결선 18">
+      <p:sp>
+        <p:nvSpPr>
+          <p:cNvPr id="10" name="TextBox 9">
             <a:extLst>
               <a:ext uri="{FF2B5EF4-FFF2-40B4-BE49-F238E27FC236}">
-                <a16:creationId xmlns:a16="http://schemas.microsoft.com/office/drawing/2014/main" id="{14C95592-5975-3F75-04A2-4E7537D0AAFE}"/>
+                <a16:creationId xmlns:a16="http://schemas.microsoft.com/office/drawing/2014/main" id="{6789DBD2-1297-F44C-A07B-26E079CC782B}"/>
               </a:ext>
             </a:extLst>
           </p:cNvPr>
-          <p:cNvCxnSpPr/>
+          <p:cNvSpPr txBox="1"/>
           <p:nvPr/>
-        </p:nvCxnSpPr>
+        </p:nvSpPr>
         <p:spPr>
           <a:xfrm>
-            <a:off x="7226708" y="2598969"/>
-            <a:ext cx="2153265" cy="0"/>
+            <a:off x="1189335" y="5297557"/>
+            <a:ext cx="1868556" cy="369332"/>
           </a:xfrm>
-          <a:prstGeom prst="line">
+          <a:prstGeom prst="rect">
             <a:avLst/>
           </a:prstGeom>
-          <a:ln>
-            <a:solidFill>
-              <a:schemeClr val="bg1"/>
-            </a:solidFill>
-            <a:headEnd type="none" w="med" len="med"/>
-            <a:tailEnd type="none" w="med" len="med"/>
-          </a:ln>
+          <a:noFill/>
         </p:spPr>
-        <p:style>
-          <a:lnRef idx="2">
-            <a:schemeClr val="accent1"/>
-          </a:lnRef>
-          <a:fillRef idx="0">
-            <a:schemeClr val="accent1"/>
-          </a:fillRef>
-          <a:effectRef idx="1">
-            <a:schemeClr val="accent1"/>
-          </a:effectRef>
-          <a:fontRef idx="minor">
-            <a:schemeClr val="tx1"/>
-          </a:fontRef>
-        </p:style>
-      </p:cxnSp>
+        <p:txBody>
+          <a:bodyPr wrap="square" rtlCol="0">
+            <a:spAutoFit/>
+          </a:bodyPr>
+          <a:lstStyle/>
+          <a:p>
+            <a:pPr algn="ctr"/>
+            <a:r>
+              <a:rPr lang="ko-KR" altLang="en-US">
+                <a:solidFill>
+                  <a:schemeClr val="bg1"/>
+                </a:solidFill>
+                <a:latin typeface="G마켓 산스 TTF Medium" panose="02000000000000000000" pitchFamily="2" charset="-127"/>
+                <a:ea typeface="G마켓 산스 TTF Medium" panose="02000000000000000000" pitchFamily="2" charset="-127"/>
+              </a:rPr>
+              <a:t>온도 시스템</a:t>
+            </a:r>
+            <a:endParaRPr lang="ko-KR" altLang="en-US" dirty="0" err="1">
+              <a:solidFill>
+                <a:schemeClr val="bg1"/>
+              </a:solidFill>
+              <a:latin typeface="G마켓 산스 TTF Medium" panose="02000000000000000000" pitchFamily="2" charset="-127"/>
+              <a:ea typeface="G마켓 산스 TTF Medium" panose="02000000000000000000" pitchFamily="2" charset="-127"/>
+            </a:endParaRPr>
+          </a:p>
+        </p:txBody>
+      </p:sp>
+      <p:pic>
+        <p:nvPicPr>
+          <p:cNvPr id="12" name="그림 11">
+            <a:extLst>
+              <a:ext uri="{FF2B5EF4-FFF2-40B4-BE49-F238E27FC236}">
+                <a16:creationId xmlns:a16="http://schemas.microsoft.com/office/drawing/2014/main" id="{8EC31D67-77C6-3333-DB12-0315B0D09534}"/>
+              </a:ext>
+            </a:extLst>
+          </p:cNvPr>
+          <p:cNvPicPr>
+            <a:picLocks noChangeAspect="1"/>
+          </p:cNvPicPr>
+          <p:nvPr/>
+        </p:nvPicPr>
+        <p:blipFill>
+          <a:blip r:embed="rId4"/>
+          <a:stretch>
+            <a:fillRect/>
+          </a:stretch>
+        </p:blipFill>
+        <p:spPr>
+          <a:xfrm>
+            <a:off x="838200" y="2442789"/>
+            <a:ext cx="2607630" cy="2534791"/>
+          </a:xfrm>
+          <a:prstGeom prst="rect">
+            <a:avLst/>
+          </a:prstGeom>
+        </p:spPr>
+      </p:pic>
     </p:spTree>
     <p:extLst>
       <p:ext uri="{BB962C8B-B14F-4D97-AF65-F5344CB8AC3E}">
-        <p14:creationId xmlns:p14="http://schemas.microsoft.com/office/powerpoint/2010/main" val="1210110838"/>
+        <p14:creationId xmlns:p14="http://schemas.microsoft.com/office/powerpoint/2010/main" val="1519297890"/>
       </p:ext>
     </p:extLst>
   </p:cSld>
@@ -6110,7 +5973,7 @@
         <p:cNvPr id="1" name="">
           <a:extLst>
             <a:ext uri="{FF2B5EF4-FFF2-40B4-BE49-F238E27FC236}">
-              <a16:creationId xmlns:a16="http://schemas.microsoft.com/office/drawing/2014/main" id="{37F1D011-22A8-4BB2-A2BF-F8CE02747AF3}"/>
+              <a16:creationId xmlns:a16="http://schemas.microsoft.com/office/drawing/2014/main" id="{584668C4-5C2D-5164-12DA-4C40E864A748}"/>
             </a:ext>
           </a:extLst>
         </p:cNvPr>
@@ -6127,10 +5990,10 @@
       </p:grpSpPr>
       <p:pic>
         <p:nvPicPr>
-          <p:cNvPr id="3" name="그림 2">
+          <p:cNvPr id="4" name="그림 3">
             <a:extLst>
               <a:ext uri="{FF2B5EF4-FFF2-40B4-BE49-F238E27FC236}">
-                <a16:creationId xmlns:a16="http://schemas.microsoft.com/office/drawing/2014/main" id="{E18C6DB5-6E17-B809-0DAF-6A7E75E00CD2}"/>
+                <a16:creationId xmlns:a16="http://schemas.microsoft.com/office/drawing/2014/main" id="{472C7145-75CE-EB84-57E3-7E22F0E00749}"/>
               </a:ext>
             </a:extLst>
           </p:cNvPr>
@@ -6163,10 +6026,10 @@
       </p:pic>
       <p:sp>
         <p:nvSpPr>
-          <p:cNvPr id="4" name="직사각형 3">
+          <p:cNvPr id="5" name="직사각형 4">
             <a:extLst>
               <a:ext uri="{FF2B5EF4-FFF2-40B4-BE49-F238E27FC236}">
-                <a16:creationId xmlns:a16="http://schemas.microsoft.com/office/drawing/2014/main" id="{B99F07A2-B86B-4A2D-8A3A-B72C07CF595E}"/>
+                <a16:creationId xmlns:a16="http://schemas.microsoft.com/office/drawing/2014/main" id="{96C3823E-4240-EC04-B526-3130C6C61BB1}"/>
               </a:ext>
             </a:extLst>
           </p:cNvPr>
@@ -6223,10 +6086,10 @@
       </p:sp>
       <p:cxnSp>
         <p:nvCxnSpPr>
-          <p:cNvPr id="5" name="직선 연결선 4">
+          <p:cNvPr id="6" name="직선 연결선 5">
             <a:extLst>
               <a:ext uri="{FF2B5EF4-FFF2-40B4-BE49-F238E27FC236}">
-                <a16:creationId xmlns:a16="http://schemas.microsoft.com/office/drawing/2014/main" id="{D9C158DA-CC5D-19A0-BCAC-1B1A1179665C}"/>
+                <a16:creationId xmlns:a16="http://schemas.microsoft.com/office/drawing/2014/main" id="{79F76D62-0F10-9EAF-D195-C788F0647F9C}"/>
               </a:ext>
             </a:extLst>
           </p:cNvPr>
@@ -6268,7 +6131,7 @@
           <p:cNvPr id="2" name="제목 1">
             <a:extLst>
               <a:ext uri="{FF2B5EF4-FFF2-40B4-BE49-F238E27FC236}">
-                <a16:creationId xmlns:a16="http://schemas.microsoft.com/office/drawing/2014/main" id="{E9D5AC4D-3D41-C625-015F-CA8B9EB030ED}"/>
+                <a16:creationId xmlns:a16="http://schemas.microsoft.com/office/drawing/2014/main" id="{D27985CE-5FF2-EFB2-2D60-22633EA61C32}"/>
               </a:ext>
             </a:extLst>
           </p:cNvPr>
@@ -6294,7 +6157,27 @@
                 <a:latin typeface="G마켓 산스 TTF Bold" panose="02000000000000000000" pitchFamily="2" charset="-127"/>
                 <a:ea typeface="G마켓 산스 TTF Bold" panose="02000000000000000000" pitchFamily="2" charset="-127"/>
               </a:rPr>
-              <a:t>개발 내용</a:t>
+              <a:t>개발 내용 </a:t>
+            </a:r>
+            <a:r>
+              <a:rPr lang="en-US" altLang="ko-KR" sz="4800">
+                <a:solidFill>
+                  <a:schemeClr val="bg1"/>
+                </a:solidFill>
+                <a:latin typeface="G마켓 산스 TTF Bold" panose="02000000000000000000" pitchFamily="2" charset="-127"/>
+                <a:ea typeface="G마켓 산스 TTF Bold" panose="02000000000000000000" pitchFamily="2" charset="-127"/>
+              </a:rPr>
+              <a:t>– </a:t>
+            </a:r>
+            <a:r>
+              <a:rPr lang="ko-KR" altLang="en-US" sz="4800">
+                <a:solidFill>
+                  <a:schemeClr val="bg1"/>
+                </a:solidFill>
+                <a:latin typeface="G마켓 산스 TTF Bold" panose="02000000000000000000" pitchFamily="2" charset="-127"/>
+                <a:ea typeface="G마켓 산스 TTF Bold" panose="02000000000000000000" pitchFamily="2" charset="-127"/>
+              </a:rPr>
+              <a:t>시각적 표현</a:t>
             </a:r>
             <a:endParaRPr lang="ko-KR" altLang="en-US" sz="4800" dirty="0">
               <a:solidFill>
@@ -6306,12 +6189,72 @@
           </a:p>
         </p:txBody>
       </p:sp>
+      <p:pic>
+        <p:nvPicPr>
+          <p:cNvPr id="7" name="그림 6">
+            <a:extLst>
+              <a:ext uri="{FF2B5EF4-FFF2-40B4-BE49-F238E27FC236}">
+                <a16:creationId xmlns:a16="http://schemas.microsoft.com/office/drawing/2014/main" id="{7C19FEE3-4AC4-7E73-3ACD-C79212A3289C}"/>
+              </a:ext>
+            </a:extLst>
+          </p:cNvPr>
+          <p:cNvPicPr>
+            <a:picLocks noChangeAspect="1"/>
+          </p:cNvPicPr>
+          <p:nvPr/>
+        </p:nvPicPr>
+        <p:blipFill>
+          <a:blip r:embed="rId3"/>
+          <a:stretch>
+            <a:fillRect/>
+          </a:stretch>
+        </p:blipFill>
+        <p:spPr>
+          <a:xfrm>
+            <a:off x="7117968" y="2491123"/>
+            <a:ext cx="3808449" cy="3104608"/>
+          </a:xfrm>
+          <a:prstGeom prst="rect">
+            <a:avLst/>
+          </a:prstGeom>
+        </p:spPr>
+      </p:pic>
+      <p:pic>
+        <p:nvPicPr>
+          <p:cNvPr id="9" name="그림 8">
+            <a:extLst>
+              <a:ext uri="{FF2B5EF4-FFF2-40B4-BE49-F238E27FC236}">
+                <a16:creationId xmlns:a16="http://schemas.microsoft.com/office/drawing/2014/main" id="{665B8A2D-49E8-BB70-68B6-7C03DAD0C547}"/>
+              </a:ext>
+            </a:extLst>
+          </p:cNvPr>
+          <p:cNvPicPr>
+            <a:picLocks noChangeAspect="1"/>
+          </p:cNvPicPr>
+          <p:nvPr/>
+        </p:nvPicPr>
+        <p:blipFill>
+          <a:blip r:embed="rId4"/>
+          <a:stretch>
+            <a:fillRect/>
+          </a:stretch>
+        </p:blipFill>
+        <p:spPr>
+          <a:xfrm>
+            <a:off x="1265583" y="2896502"/>
+            <a:ext cx="4324954" cy="2143424"/>
+          </a:xfrm>
+          <a:prstGeom prst="rect">
+            <a:avLst/>
+          </a:prstGeom>
+        </p:spPr>
+      </p:pic>
       <p:sp>
         <p:nvSpPr>
           <p:cNvPr id="10" name="TextBox 9">
             <a:extLst>
               <a:ext uri="{FF2B5EF4-FFF2-40B4-BE49-F238E27FC236}">
-                <a16:creationId xmlns:a16="http://schemas.microsoft.com/office/drawing/2014/main" id="{0BA2DF75-E643-4A35-3F72-E584304AB4BE}"/>
+                <a16:creationId xmlns:a16="http://schemas.microsoft.com/office/drawing/2014/main" id="{9A6E312D-8DEF-4E15-2E1D-9BE027FF58CA}"/>
               </a:ext>
             </a:extLst>
           </p:cNvPr>
@@ -6320,106 +6263,8 @@
         </p:nvSpPr>
         <p:spPr>
           <a:xfrm>
-            <a:off x="1297871" y="2690336"/>
-            <a:ext cx="4119707" cy="369332"/>
-          </a:xfrm>
-          <a:prstGeom prst="rect">
-            <a:avLst/>
-          </a:prstGeom>
-          <a:noFill/>
-        </p:spPr>
-        <p:txBody>
-          <a:bodyPr wrap="square">
-            <a:spAutoFit/>
-          </a:bodyPr>
-          <a:lstStyle/>
-          <a:p>
-            <a:pPr algn="ctr"/>
-            <a:r>
-              <a:rPr lang="ko-KR" altLang="en-US">
-                <a:solidFill>
-                  <a:schemeClr val="bg1"/>
-                </a:solidFill>
-                <a:latin typeface="G마켓 산스 TTF Light" panose="02000000000000000000" pitchFamily="2" charset="-127"/>
-                <a:ea typeface="G마켓 산스 TTF Light" panose="02000000000000000000" pitchFamily="2" charset="-127"/>
-              </a:rPr>
-              <a:t>ㅇ</a:t>
-            </a:r>
-            <a:endParaRPr lang="ko-KR" altLang="en-US" dirty="0">
-              <a:solidFill>
-                <a:schemeClr val="bg1"/>
-              </a:solidFill>
-              <a:latin typeface="G마켓 산스 TTF Light" panose="02000000000000000000" pitchFamily="2" charset="-127"/>
-              <a:ea typeface="G마켓 산스 TTF Light" panose="02000000000000000000" pitchFamily="2" charset="-127"/>
-            </a:endParaRPr>
-          </a:p>
-        </p:txBody>
-      </p:sp>
-      <p:sp>
-        <p:nvSpPr>
-          <p:cNvPr id="12" name="TextBox 11">
-            <a:extLst>
-              <a:ext uri="{FF2B5EF4-FFF2-40B4-BE49-F238E27FC236}">
-                <a16:creationId xmlns:a16="http://schemas.microsoft.com/office/drawing/2014/main" id="{2E085282-B574-11B3-6878-474D1C1860D8}"/>
-              </a:ext>
-            </a:extLst>
-          </p:cNvPr>
-          <p:cNvSpPr txBox="1"/>
-          <p:nvPr/>
-        </p:nvSpPr>
-        <p:spPr>
-          <a:xfrm>
-            <a:off x="6024701" y="2690336"/>
-            <a:ext cx="4869428" cy="369332"/>
-          </a:xfrm>
-          <a:prstGeom prst="rect">
-            <a:avLst/>
-          </a:prstGeom>
-          <a:noFill/>
-        </p:spPr>
-        <p:txBody>
-          <a:bodyPr wrap="square">
-            <a:spAutoFit/>
-          </a:bodyPr>
-          <a:lstStyle/>
-          <a:p>
-            <a:pPr algn="ctr"/>
-            <a:r>
-              <a:rPr lang="ko-KR" altLang="en-US">
-                <a:solidFill>
-                  <a:schemeClr val="bg1"/>
-                </a:solidFill>
-                <a:latin typeface="G마켓 산스 TTF Light" panose="02000000000000000000" pitchFamily="2" charset="-127"/>
-                <a:ea typeface="G마켓 산스 TTF Light" panose="02000000000000000000" pitchFamily="2" charset="-127"/>
-              </a:rPr>
-              <a:t>ㅇ</a:t>
-            </a:r>
-            <a:endParaRPr lang="ko-KR" altLang="en-US" dirty="0">
-              <a:solidFill>
-                <a:schemeClr val="bg1"/>
-              </a:solidFill>
-              <a:latin typeface="G마켓 산스 TTF Light" panose="02000000000000000000" pitchFamily="2" charset="-127"/>
-              <a:ea typeface="G마켓 산스 TTF Light" panose="02000000000000000000" pitchFamily="2" charset="-127"/>
-            </a:endParaRPr>
-          </a:p>
-        </p:txBody>
-      </p:sp>
-      <p:sp>
-        <p:nvSpPr>
-          <p:cNvPr id="15" name="TextBox 14">
-            <a:extLst>
-              <a:ext uri="{FF2B5EF4-FFF2-40B4-BE49-F238E27FC236}">
-                <a16:creationId xmlns:a16="http://schemas.microsoft.com/office/drawing/2014/main" id="{F98F3B82-E73F-0B9F-7F47-A6804BD41B54}"/>
-              </a:ext>
-            </a:extLst>
-          </p:cNvPr>
-          <p:cNvSpPr txBox="1"/>
-          <p:nvPr/>
-        </p:nvSpPr>
-        <p:spPr>
-          <a:xfrm>
-            <a:off x="1769816" y="1971711"/>
-            <a:ext cx="3175820" cy="584775"/>
+            <a:off x="2419238" y="5686767"/>
+            <a:ext cx="2017644" cy="369332"/>
           </a:xfrm>
           <a:prstGeom prst="rect">
             <a:avLst/>
@@ -6434,16 +6279,16 @@
           <a:p>
             <a:pPr algn="ctr"/>
             <a:r>
-              <a:rPr lang="ko-KR" altLang="en-US" sz="3200">
+              <a:rPr lang="ko-KR" altLang="en-US">
                 <a:solidFill>
                   <a:schemeClr val="bg1"/>
                 </a:solidFill>
                 <a:latin typeface="G마켓 산스 TTF Medium" panose="02000000000000000000" pitchFamily="2" charset="-127"/>
                 <a:ea typeface="G마켓 산스 TTF Medium" panose="02000000000000000000" pitchFamily="2" charset="-127"/>
               </a:rPr>
-              <a:t>송형규</a:t>
-            </a:r>
-            <a:endParaRPr lang="ko-KR" altLang="en-US" sz="3200" dirty="0">
+              <a:t>열화상 카메라</a:t>
+            </a:r>
+            <a:endParaRPr lang="ko-KR" altLang="en-US" dirty="0" err="1">
               <a:solidFill>
                 <a:schemeClr val="bg1"/>
               </a:solidFill>
@@ -6453,55 +6298,12 @@
           </a:p>
         </p:txBody>
       </p:sp>
-      <p:cxnSp>
-        <p:nvCxnSpPr>
-          <p:cNvPr id="17" name="직선 연결선 16">
+      <p:sp>
+        <p:nvSpPr>
+          <p:cNvPr id="11" name="TextBox 10">
             <a:extLst>
               <a:ext uri="{FF2B5EF4-FFF2-40B4-BE49-F238E27FC236}">
-                <a16:creationId xmlns:a16="http://schemas.microsoft.com/office/drawing/2014/main" id="{26BEA324-22CB-CF59-0B00-D907B063A5B5}"/>
-              </a:ext>
-            </a:extLst>
-          </p:cNvPr>
-          <p:cNvCxnSpPr/>
-          <p:nvPr/>
-        </p:nvCxnSpPr>
-        <p:spPr>
-          <a:xfrm>
-            <a:off x="2281093" y="2556486"/>
-            <a:ext cx="2153265" cy="0"/>
-          </a:xfrm>
-          <a:prstGeom prst="line">
-            <a:avLst/>
-          </a:prstGeom>
-          <a:ln>
-            <a:solidFill>
-              <a:schemeClr val="bg1"/>
-            </a:solidFill>
-            <a:headEnd type="none" w="med" len="med"/>
-            <a:tailEnd type="none" w="med" len="med"/>
-          </a:ln>
-        </p:spPr>
-        <p:style>
-          <a:lnRef idx="2">
-            <a:schemeClr val="accent1"/>
-          </a:lnRef>
-          <a:fillRef idx="0">
-            <a:schemeClr val="accent1"/>
-          </a:fillRef>
-          <a:effectRef idx="1">
-            <a:schemeClr val="accent1"/>
-          </a:effectRef>
-          <a:fontRef idx="minor">
-            <a:schemeClr val="tx1"/>
-          </a:fontRef>
-        </p:style>
-      </p:cxnSp>
-      <p:sp>
-        <p:nvSpPr>
-          <p:cNvPr id="18" name="TextBox 17">
-            <a:extLst>
-              <a:ext uri="{FF2B5EF4-FFF2-40B4-BE49-F238E27FC236}">
-                <a16:creationId xmlns:a16="http://schemas.microsoft.com/office/drawing/2014/main" id="{356AFF09-B502-588B-8375-20FB50AA86EC}"/>
+                <a16:creationId xmlns:a16="http://schemas.microsoft.com/office/drawing/2014/main" id="{E7CDE574-963A-3572-4FE0-8E4522ABE420}"/>
               </a:ext>
             </a:extLst>
           </p:cNvPr>
@@ -6510,8 +6312,8 @@
         </p:nvSpPr>
         <p:spPr>
           <a:xfrm>
-            <a:off x="6715431" y="2014194"/>
-            <a:ext cx="3175820" cy="584775"/>
+            <a:off x="8013370" y="5686767"/>
+            <a:ext cx="2017644" cy="369332"/>
           </a:xfrm>
           <a:prstGeom prst="rect">
             <a:avLst/>
@@ -6526,65 +6328,29 @@
           <a:p>
             <a:pPr algn="ctr"/>
             <a:r>
-              <a:rPr lang="ko-KR" altLang="en-US" sz="3200" dirty="0">
+              <a:rPr lang="ko-KR" altLang="en-US">
                 <a:solidFill>
                   <a:schemeClr val="bg1"/>
                 </a:solidFill>
                 <a:latin typeface="G마켓 산스 TTF Medium" panose="02000000000000000000" pitchFamily="2" charset="-127"/>
                 <a:ea typeface="G마켓 산스 TTF Medium" panose="02000000000000000000" pitchFamily="2" charset="-127"/>
               </a:rPr>
-              <a:t>신성재</a:t>
-            </a:r>
+              <a:t>자기장</a:t>
+            </a:r>
+            <a:endParaRPr lang="ko-KR" altLang="en-US" dirty="0" err="1">
+              <a:solidFill>
+                <a:schemeClr val="bg1"/>
+              </a:solidFill>
+              <a:latin typeface="G마켓 산스 TTF Medium" panose="02000000000000000000" pitchFamily="2" charset="-127"/>
+              <a:ea typeface="G마켓 산스 TTF Medium" panose="02000000000000000000" pitchFamily="2" charset="-127"/>
+            </a:endParaRPr>
           </a:p>
         </p:txBody>
       </p:sp>
-      <p:cxnSp>
-        <p:nvCxnSpPr>
-          <p:cNvPr id="19" name="직선 연결선 18">
-            <a:extLst>
-              <a:ext uri="{FF2B5EF4-FFF2-40B4-BE49-F238E27FC236}">
-                <a16:creationId xmlns:a16="http://schemas.microsoft.com/office/drawing/2014/main" id="{AA2B72AE-61F7-0DE9-3AD3-03F8F844246F}"/>
-              </a:ext>
-            </a:extLst>
-          </p:cNvPr>
-          <p:cNvCxnSpPr/>
-          <p:nvPr/>
-        </p:nvCxnSpPr>
-        <p:spPr>
-          <a:xfrm>
-            <a:off x="7226708" y="2598969"/>
-            <a:ext cx="2153265" cy="0"/>
-          </a:xfrm>
-          <a:prstGeom prst="line">
-            <a:avLst/>
-          </a:prstGeom>
-          <a:ln>
-            <a:solidFill>
-              <a:schemeClr val="bg1"/>
-            </a:solidFill>
-            <a:headEnd type="none" w="med" len="med"/>
-            <a:tailEnd type="none" w="med" len="med"/>
-          </a:ln>
-        </p:spPr>
-        <p:style>
-          <a:lnRef idx="2">
-            <a:schemeClr val="accent1"/>
-          </a:lnRef>
-          <a:fillRef idx="0">
-            <a:schemeClr val="accent1"/>
-          </a:fillRef>
-          <a:effectRef idx="1">
-            <a:schemeClr val="accent1"/>
-          </a:effectRef>
-          <a:fontRef idx="minor">
-            <a:schemeClr val="tx1"/>
-          </a:fontRef>
-        </p:style>
-      </p:cxnSp>
     </p:spTree>
     <p:extLst>
       <p:ext uri="{BB962C8B-B14F-4D97-AF65-F5344CB8AC3E}">
-        <p14:creationId xmlns:p14="http://schemas.microsoft.com/office/powerpoint/2010/main" val="2592642216"/>
+        <p14:creationId xmlns:p14="http://schemas.microsoft.com/office/powerpoint/2010/main" val="3643780090"/>
       </p:ext>
     </p:extLst>
   </p:cSld>
@@ -6813,7 +6579,7 @@
         <p:spPr>
           <a:xfrm>
             <a:off x="1297871" y="2690336"/>
-            <a:ext cx="4119707" cy="369332"/>
+            <a:ext cx="4188529" cy="2585323"/>
           </a:xfrm>
           <a:prstGeom prst="rect">
             <a:avLst/>
@@ -6835,9 +6601,179 @@
                 <a:latin typeface="G마켓 산스 TTF Light" panose="02000000000000000000" pitchFamily="2" charset="-127"/>
                 <a:ea typeface="G마켓 산스 TTF Light" panose="02000000000000000000" pitchFamily="2" charset="-127"/>
               </a:rPr>
-              <a:t>ㅇ</a:t>
-            </a:r>
-            <a:endParaRPr lang="ko-KR" altLang="en-US" dirty="0">
+              <a:t>교육용 게임으로서</a:t>
+            </a:r>
+            <a:endParaRPr lang="en-US" altLang="ko-KR">
+              <a:solidFill>
+                <a:schemeClr val="bg1"/>
+              </a:solidFill>
+              <a:latin typeface="G마켓 산스 TTF Light" panose="02000000000000000000" pitchFamily="2" charset="-127"/>
+              <a:ea typeface="G마켓 산스 TTF Light" panose="02000000000000000000" pitchFamily="2" charset="-127"/>
+            </a:endParaRPr>
+          </a:p>
+          <a:p>
+            <a:pPr algn="ctr"/>
+            <a:r>
+              <a:rPr lang="ko-KR" altLang="en-US">
+                <a:solidFill>
+                  <a:schemeClr val="bg1"/>
+                </a:solidFill>
+                <a:latin typeface="G마켓 산스 TTF Light" panose="02000000000000000000" pitchFamily="2" charset="-127"/>
+                <a:ea typeface="G마켓 산스 TTF Light" panose="02000000000000000000" pitchFamily="2" charset="-127"/>
+              </a:rPr>
+              <a:t>교육과정에 들어가는 온도</a:t>
+            </a:r>
+            <a:r>
+              <a:rPr lang="en-US" altLang="ko-KR">
+                <a:solidFill>
+                  <a:schemeClr val="bg1"/>
+                </a:solidFill>
+                <a:latin typeface="G마켓 산스 TTF Light" panose="02000000000000000000" pitchFamily="2" charset="-127"/>
+                <a:ea typeface="G마켓 산스 TTF Light" panose="02000000000000000000" pitchFamily="2" charset="-127"/>
+              </a:rPr>
+              <a:t>, </a:t>
+            </a:r>
+            <a:r>
+              <a:rPr lang="ko-KR" altLang="en-US">
+                <a:solidFill>
+                  <a:schemeClr val="bg1"/>
+                </a:solidFill>
+                <a:latin typeface="G마켓 산스 TTF Light" panose="02000000000000000000" pitchFamily="2" charset="-127"/>
+                <a:ea typeface="G마켓 산스 TTF Light" panose="02000000000000000000" pitchFamily="2" charset="-127"/>
+              </a:rPr>
+              <a:t>자기장 등</a:t>
+            </a:r>
+            <a:endParaRPr lang="en-US" altLang="ko-KR">
+              <a:solidFill>
+                <a:schemeClr val="bg1"/>
+              </a:solidFill>
+              <a:latin typeface="G마켓 산스 TTF Light" panose="02000000000000000000" pitchFamily="2" charset="-127"/>
+              <a:ea typeface="G마켓 산스 TTF Light" panose="02000000000000000000" pitchFamily="2" charset="-127"/>
+            </a:endParaRPr>
+          </a:p>
+          <a:p>
+            <a:pPr algn="ctr"/>
+            <a:r>
+              <a:rPr lang="ko-KR" altLang="en-US">
+                <a:solidFill>
+                  <a:schemeClr val="bg1"/>
+                </a:solidFill>
+                <a:latin typeface="G마켓 산스 TTF Light" panose="02000000000000000000" pitchFamily="2" charset="-127"/>
+                <a:ea typeface="G마켓 산스 TTF Light" panose="02000000000000000000" pitchFamily="2" charset="-127"/>
+              </a:rPr>
+              <a:t>시스템들을 온전히 담아내지 못 함</a:t>
+            </a:r>
+            <a:endParaRPr lang="en-US" altLang="ko-KR">
+              <a:solidFill>
+                <a:schemeClr val="bg1"/>
+              </a:solidFill>
+              <a:latin typeface="G마켓 산스 TTF Light" panose="02000000000000000000" pitchFamily="2" charset="-127"/>
+              <a:ea typeface="G마켓 산스 TTF Light" panose="02000000000000000000" pitchFamily="2" charset="-127"/>
+            </a:endParaRPr>
+          </a:p>
+          <a:p>
+            <a:pPr algn="ctr"/>
+            <a:endParaRPr lang="en-US" altLang="ko-KR">
+              <a:solidFill>
+                <a:schemeClr val="bg1"/>
+              </a:solidFill>
+              <a:latin typeface="G마켓 산스 TTF Light" panose="02000000000000000000" pitchFamily="2" charset="-127"/>
+              <a:ea typeface="G마켓 산스 TTF Light" panose="02000000000000000000" pitchFamily="2" charset="-127"/>
+            </a:endParaRPr>
+          </a:p>
+          <a:p>
+            <a:pPr algn="ctr"/>
+            <a:endParaRPr lang="en-US" altLang="ko-KR">
+              <a:solidFill>
+                <a:schemeClr val="bg1"/>
+              </a:solidFill>
+              <a:latin typeface="G마켓 산스 TTF Light" panose="02000000000000000000" pitchFamily="2" charset="-127"/>
+              <a:ea typeface="G마켓 산스 TTF Light" panose="02000000000000000000" pitchFamily="2" charset="-127"/>
+            </a:endParaRPr>
+          </a:p>
+          <a:p>
+            <a:pPr algn="ctr"/>
+            <a:endParaRPr lang="en-US" altLang="ko-KR">
+              <a:solidFill>
+                <a:schemeClr val="bg1"/>
+              </a:solidFill>
+              <a:latin typeface="G마켓 산스 TTF Light" panose="02000000000000000000" pitchFamily="2" charset="-127"/>
+              <a:ea typeface="G마켓 산스 TTF Light" panose="02000000000000000000" pitchFamily="2" charset="-127"/>
+            </a:endParaRPr>
+          </a:p>
+          <a:p>
+            <a:pPr algn="ctr"/>
+            <a:r>
+              <a:rPr lang="ko-KR" altLang="en-US">
+                <a:solidFill>
+                  <a:schemeClr val="bg1"/>
+                </a:solidFill>
+                <a:latin typeface="G마켓 산스 TTF Light" panose="02000000000000000000" pitchFamily="2" charset="-127"/>
+                <a:ea typeface="G마켓 산스 TTF Light" panose="02000000000000000000" pitchFamily="2" charset="-127"/>
+              </a:rPr>
+              <a:t>고유 저항과 과전류</a:t>
+            </a:r>
+            <a:r>
+              <a:rPr lang="en-US" altLang="ko-KR">
+                <a:solidFill>
+                  <a:schemeClr val="bg1"/>
+                </a:solidFill>
+                <a:latin typeface="G마켓 산스 TTF Light" panose="02000000000000000000" pitchFamily="2" charset="-127"/>
+                <a:ea typeface="G마켓 산스 TTF Light" panose="02000000000000000000" pitchFamily="2" charset="-127"/>
+              </a:rPr>
+              <a:t>, </a:t>
+            </a:r>
+            <a:r>
+              <a:rPr lang="ko-KR" altLang="en-US">
+                <a:solidFill>
+                  <a:schemeClr val="bg1"/>
+                </a:solidFill>
+                <a:latin typeface="G마켓 산스 TTF Light" panose="02000000000000000000" pitchFamily="2" charset="-127"/>
+                <a:ea typeface="G마켓 산스 TTF Light" panose="02000000000000000000" pitchFamily="2" charset="-127"/>
+              </a:rPr>
+              <a:t>코일과 유도전류</a:t>
+            </a:r>
+            <a:endParaRPr lang="en-US" altLang="ko-KR">
+              <a:solidFill>
+                <a:schemeClr val="bg1"/>
+              </a:solidFill>
+              <a:latin typeface="G마켓 산스 TTF Light" panose="02000000000000000000" pitchFamily="2" charset="-127"/>
+              <a:ea typeface="G마켓 산스 TTF Light" panose="02000000000000000000" pitchFamily="2" charset="-127"/>
+            </a:endParaRPr>
+          </a:p>
+          <a:p>
+            <a:pPr algn="ctr"/>
+            <a:r>
+              <a:rPr lang="ko-KR" altLang="en-US">
+                <a:solidFill>
+                  <a:schemeClr val="bg1"/>
+                </a:solidFill>
+                <a:latin typeface="G마켓 산스 TTF Light" panose="02000000000000000000" pitchFamily="2" charset="-127"/>
+                <a:ea typeface="G마켓 산스 TTF Light" panose="02000000000000000000" pitchFamily="2" charset="-127"/>
+              </a:rPr>
+              <a:t>같은 추가적인 콘텐츠를 제작하여</a:t>
+            </a:r>
+            <a:endParaRPr lang="en-US" altLang="ko-KR">
+              <a:solidFill>
+                <a:schemeClr val="bg1"/>
+              </a:solidFill>
+              <a:latin typeface="G마켓 산스 TTF Light" panose="02000000000000000000" pitchFamily="2" charset="-127"/>
+              <a:ea typeface="G마켓 산스 TTF Light" panose="02000000000000000000" pitchFamily="2" charset="-127"/>
+            </a:endParaRPr>
+          </a:p>
+          <a:p>
+            <a:pPr algn="ctr"/>
+            <a:r>
+              <a:rPr lang="ko-KR" altLang="en-US">
+                <a:solidFill>
+                  <a:schemeClr val="bg1"/>
+                </a:solidFill>
+                <a:latin typeface="G마켓 산스 TTF Light" panose="02000000000000000000" pitchFamily="2" charset="-127"/>
+                <a:ea typeface="G마켓 산스 TTF Light" panose="02000000000000000000" pitchFamily="2" charset="-127"/>
+              </a:rPr>
+              <a:t>교육용 게임으로서의 컨셉 강화</a:t>
+            </a:r>
+            <a:endParaRPr lang="en-US" altLang="ko-KR">
               <a:solidFill>
                 <a:schemeClr val="bg1"/>
               </a:solidFill>
@@ -6861,8 +6797,8 @@
         </p:nvSpPr>
         <p:spPr>
           <a:xfrm>
-            <a:off x="6024701" y="2690336"/>
-            <a:ext cx="4869428" cy="369332"/>
+            <a:off x="5868626" y="2690336"/>
+            <a:ext cx="4869428" cy="2585323"/>
           </a:xfrm>
           <a:prstGeom prst="rect">
             <a:avLst/>
@@ -6884,9 +6820,229 @@
                 <a:latin typeface="G마켓 산스 TTF Light" panose="02000000000000000000" pitchFamily="2" charset="-127"/>
                 <a:ea typeface="G마켓 산스 TTF Light" panose="02000000000000000000" pitchFamily="2" charset="-127"/>
               </a:rPr>
-              <a:t>ㅇ</a:t>
-            </a:r>
-            <a:endParaRPr lang="ko-KR" altLang="en-US" dirty="0">
+              <a:t>온도</a:t>
+            </a:r>
+            <a:r>
+              <a:rPr lang="en-US" altLang="ko-KR">
+                <a:solidFill>
+                  <a:schemeClr val="bg1"/>
+                </a:solidFill>
+                <a:latin typeface="G마켓 산스 TTF Light" panose="02000000000000000000" pitchFamily="2" charset="-127"/>
+                <a:ea typeface="G마켓 산스 TTF Light" panose="02000000000000000000" pitchFamily="2" charset="-127"/>
+              </a:rPr>
+              <a:t>, </a:t>
+            </a:r>
+            <a:r>
+              <a:rPr lang="ko-KR" altLang="en-US">
+                <a:solidFill>
+                  <a:schemeClr val="bg1"/>
+                </a:solidFill>
+                <a:latin typeface="G마켓 산스 TTF Light" panose="02000000000000000000" pitchFamily="2" charset="-127"/>
+                <a:ea typeface="G마켓 산스 TTF Light" panose="02000000000000000000" pitchFamily="2" charset="-127"/>
+              </a:rPr>
+              <a:t>자기장</a:t>
+            </a:r>
+            <a:r>
+              <a:rPr lang="en-US" altLang="ko-KR">
+                <a:solidFill>
+                  <a:schemeClr val="bg1"/>
+                </a:solidFill>
+                <a:latin typeface="G마켓 산스 TTF Light" panose="02000000000000000000" pitchFamily="2" charset="-127"/>
+                <a:ea typeface="G마켓 산스 TTF Light" panose="02000000000000000000" pitchFamily="2" charset="-127"/>
+              </a:rPr>
+              <a:t>, </a:t>
+            </a:r>
+            <a:r>
+              <a:rPr lang="ko-KR" altLang="en-US">
+                <a:solidFill>
+                  <a:schemeClr val="bg1"/>
+                </a:solidFill>
+                <a:latin typeface="G마켓 산스 TTF Light" panose="02000000000000000000" pitchFamily="2" charset="-127"/>
+                <a:ea typeface="G마켓 산스 TTF Light" panose="02000000000000000000" pitchFamily="2" charset="-127"/>
+              </a:rPr>
+              <a:t>전기의 상호작용과</a:t>
+            </a:r>
+            <a:endParaRPr lang="en-US" altLang="ko-KR">
+              <a:solidFill>
+                <a:schemeClr val="bg1"/>
+              </a:solidFill>
+              <a:latin typeface="G마켓 산스 TTF Light" panose="02000000000000000000" pitchFamily="2" charset="-127"/>
+              <a:ea typeface="G마켓 산스 TTF Light" panose="02000000000000000000" pitchFamily="2" charset="-127"/>
+            </a:endParaRPr>
+          </a:p>
+          <a:p>
+            <a:pPr algn="ctr"/>
+            <a:r>
+              <a:rPr lang="ko-KR" altLang="en-US">
+                <a:solidFill>
+                  <a:schemeClr val="bg1"/>
+                </a:solidFill>
+                <a:latin typeface="G마켓 산스 TTF Light" panose="02000000000000000000" pitchFamily="2" charset="-127"/>
+                <a:ea typeface="G마켓 산스 TTF Light" panose="02000000000000000000" pitchFamily="2" charset="-127"/>
+              </a:rPr>
+              <a:t>물체의 머티리얼을 바꾼다는 기능이</a:t>
+            </a:r>
+            <a:endParaRPr lang="en-US" altLang="ko-KR">
+              <a:solidFill>
+                <a:schemeClr val="bg1"/>
+              </a:solidFill>
+              <a:latin typeface="G마켓 산스 TTF Light" panose="02000000000000000000" pitchFamily="2" charset="-127"/>
+              <a:ea typeface="G마켓 산스 TTF Light" panose="02000000000000000000" pitchFamily="2" charset="-127"/>
+            </a:endParaRPr>
+          </a:p>
+          <a:p>
+            <a:pPr algn="ctr"/>
+            <a:r>
+              <a:rPr lang="ko-KR" altLang="en-US">
+                <a:solidFill>
+                  <a:schemeClr val="bg1"/>
+                </a:solidFill>
+                <a:latin typeface="G마켓 산스 TTF Light" panose="02000000000000000000" pitchFamily="2" charset="-127"/>
+                <a:ea typeface="G마켓 산스 TTF Light" panose="02000000000000000000" pitchFamily="2" charset="-127"/>
+              </a:rPr>
+              <a:t>오브젝트 하나당 계산을 늘림</a:t>
+            </a:r>
+            <a:endParaRPr lang="en-US" altLang="ko-KR">
+              <a:solidFill>
+                <a:schemeClr val="bg1"/>
+              </a:solidFill>
+              <a:latin typeface="G마켓 산스 TTF Light" panose="02000000000000000000" pitchFamily="2" charset="-127"/>
+              <a:ea typeface="G마켓 산스 TTF Light" panose="02000000000000000000" pitchFamily="2" charset="-127"/>
+            </a:endParaRPr>
+          </a:p>
+          <a:p>
+            <a:pPr algn="ctr"/>
+            <a:endParaRPr lang="en-US" altLang="ko-KR">
+              <a:solidFill>
+                <a:schemeClr val="bg1"/>
+              </a:solidFill>
+              <a:latin typeface="G마켓 산스 TTF Light" panose="02000000000000000000" pitchFamily="2" charset="-127"/>
+              <a:ea typeface="G마켓 산스 TTF Light" panose="02000000000000000000" pitchFamily="2" charset="-127"/>
+            </a:endParaRPr>
+          </a:p>
+          <a:p>
+            <a:pPr algn="ctr"/>
+            <a:endParaRPr lang="en-US" altLang="ko-KR">
+              <a:solidFill>
+                <a:schemeClr val="bg1"/>
+              </a:solidFill>
+              <a:latin typeface="G마켓 산스 TTF Light" panose="02000000000000000000" pitchFamily="2" charset="-127"/>
+              <a:ea typeface="G마켓 산스 TTF Light" panose="02000000000000000000" pitchFamily="2" charset="-127"/>
+            </a:endParaRPr>
+          </a:p>
+          <a:p>
+            <a:pPr algn="ctr"/>
+            <a:endParaRPr lang="en-US" altLang="ko-KR">
+              <a:solidFill>
+                <a:schemeClr val="bg1"/>
+              </a:solidFill>
+              <a:latin typeface="G마켓 산스 TTF Light" panose="02000000000000000000" pitchFamily="2" charset="-127"/>
+              <a:ea typeface="G마켓 산스 TTF Light" panose="02000000000000000000" pitchFamily="2" charset="-127"/>
+            </a:endParaRPr>
+          </a:p>
+          <a:p>
+            <a:pPr algn="ctr"/>
+            <a:r>
+              <a:rPr lang="en-US" altLang="ko-KR">
+                <a:solidFill>
+                  <a:schemeClr val="bg1"/>
+                </a:solidFill>
+                <a:latin typeface="G마켓 산스 TTF Light" panose="02000000000000000000" pitchFamily="2" charset="-127"/>
+                <a:ea typeface="G마켓 산스 TTF Light" panose="02000000000000000000" pitchFamily="2" charset="-127"/>
+              </a:rPr>
+              <a:t>LineTrace</a:t>
+            </a:r>
+            <a:r>
+              <a:rPr lang="ko-KR" altLang="en-US">
+                <a:solidFill>
+                  <a:schemeClr val="bg1"/>
+                </a:solidFill>
+                <a:latin typeface="G마켓 산스 TTF Light" panose="02000000000000000000" pitchFamily="2" charset="-127"/>
+                <a:ea typeface="G마켓 산스 TTF Light" panose="02000000000000000000" pitchFamily="2" charset="-127"/>
+              </a:rPr>
+              <a:t>에서 </a:t>
+            </a:r>
+            <a:r>
+              <a:rPr lang="en-US" altLang="ko-KR">
+                <a:solidFill>
+                  <a:schemeClr val="bg1"/>
+                </a:solidFill>
+                <a:latin typeface="G마켓 산스 TTF Light" panose="02000000000000000000" pitchFamily="2" charset="-127"/>
+                <a:ea typeface="G마켓 산스 TTF Light" panose="02000000000000000000" pitchFamily="2" charset="-127"/>
+              </a:rPr>
+              <a:t>SweepSphere </a:t>
+            </a:r>
+            <a:r>
+              <a:rPr lang="ko-KR" altLang="en-US">
+                <a:solidFill>
+                  <a:schemeClr val="bg1"/>
+                </a:solidFill>
+                <a:latin typeface="G마켓 산스 TTF Light" panose="02000000000000000000" pitchFamily="2" charset="-127"/>
+                <a:ea typeface="G마켓 산스 TTF Light" panose="02000000000000000000" pitchFamily="2" charset="-127"/>
+              </a:rPr>
+              <a:t>방식으로 최적화</a:t>
+            </a:r>
+            <a:endParaRPr lang="en-US" altLang="ko-KR">
+              <a:solidFill>
+                <a:schemeClr val="bg1"/>
+              </a:solidFill>
+              <a:latin typeface="G마켓 산스 TTF Light" panose="02000000000000000000" pitchFamily="2" charset="-127"/>
+              <a:ea typeface="G마켓 산스 TTF Light" panose="02000000000000000000" pitchFamily="2" charset="-127"/>
+            </a:endParaRPr>
+          </a:p>
+          <a:p>
+            <a:pPr algn="ctr"/>
+            <a:r>
+              <a:rPr lang="ko-KR" altLang="en-US">
+                <a:solidFill>
+                  <a:schemeClr val="bg1"/>
+                </a:solidFill>
+                <a:latin typeface="G마켓 산스 TTF Light" panose="02000000000000000000" pitchFamily="2" charset="-127"/>
+                <a:ea typeface="G마켓 산스 TTF Light" panose="02000000000000000000" pitchFamily="2" charset="-127"/>
+              </a:rPr>
+              <a:t>불필요한 </a:t>
+            </a:r>
+            <a:r>
+              <a:rPr lang="en-US" altLang="ko-KR">
+                <a:solidFill>
+                  <a:schemeClr val="bg1"/>
+                </a:solidFill>
+                <a:latin typeface="G마켓 산스 TTF Light" panose="02000000000000000000" pitchFamily="2" charset="-127"/>
+                <a:ea typeface="G마켓 산스 TTF Light" panose="02000000000000000000" pitchFamily="2" charset="-127"/>
+              </a:rPr>
+              <a:t>Tick </a:t>
+            </a:r>
+            <a:r>
+              <a:rPr lang="ko-KR" altLang="en-US">
+                <a:solidFill>
+                  <a:schemeClr val="bg1"/>
+                </a:solidFill>
+                <a:latin typeface="G마켓 산스 TTF Light" panose="02000000000000000000" pitchFamily="2" charset="-127"/>
+                <a:ea typeface="G마켓 산스 TTF Light" panose="02000000000000000000" pitchFamily="2" charset="-127"/>
+              </a:rPr>
+              <a:t>연산제거와</a:t>
+            </a:r>
+            <a:endParaRPr lang="en-US" altLang="ko-KR">
+              <a:solidFill>
+                <a:schemeClr val="bg1"/>
+              </a:solidFill>
+              <a:latin typeface="G마켓 산스 TTF Light" panose="02000000000000000000" pitchFamily="2" charset="-127"/>
+              <a:ea typeface="G마켓 산스 TTF Light" panose="02000000000000000000" pitchFamily="2" charset="-127"/>
+            </a:endParaRPr>
+          </a:p>
+          <a:p>
+            <a:pPr algn="ctr"/>
+            <a:r>
+              <a:rPr lang="ko-KR" altLang="en-US">
+                <a:solidFill>
+                  <a:schemeClr val="bg1"/>
+                </a:solidFill>
+                <a:latin typeface="G마켓 산스 TTF Light" panose="02000000000000000000" pitchFamily="2" charset="-127"/>
+                <a:ea typeface="G마켓 산스 TTF Light" panose="02000000000000000000" pitchFamily="2" charset="-127"/>
+              </a:rPr>
+              <a:t>추가적인 최적화 방안 모색중</a:t>
+            </a:r>
+            <a:endParaRPr lang="en-US" altLang="ko-KR">
               <a:solidFill>
                 <a:schemeClr val="bg1"/>
               </a:solidFill>
@@ -6910,7 +7066,7 @@
         </p:nvSpPr>
         <p:spPr>
           <a:xfrm>
-            <a:off x="1769816" y="1971711"/>
+            <a:off x="1804225" y="1968370"/>
             <a:ext cx="3175820" cy="584775"/>
           </a:xfrm>
           <a:prstGeom prst="rect">
@@ -6933,7 +7089,7 @@
                 <a:latin typeface="G마켓 산스 TTF Medium" panose="02000000000000000000" pitchFamily="2" charset="-127"/>
                 <a:ea typeface="G마켓 산스 TTF Medium" panose="02000000000000000000" pitchFamily="2" charset="-127"/>
               </a:rPr>
-              <a:t>머티리얼 변경</a:t>
+              <a:t>스테이지</a:t>
             </a:r>
             <a:endParaRPr lang="ko-KR" altLang="en-US" sz="3200" dirty="0">
               <a:solidFill>
@@ -7002,7 +7158,7 @@
         </p:nvSpPr>
         <p:spPr>
           <a:xfrm>
-            <a:off x="6715431" y="2014194"/>
+            <a:off x="6871505" y="2014194"/>
             <a:ext cx="3175820" cy="584775"/>
           </a:xfrm>
           <a:prstGeom prst="rect">
@@ -7025,7 +7181,7 @@
                 <a:latin typeface="G마켓 산스 TTF Medium" panose="02000000000000000000" pitchFamily="2" charset="-127"/>
                 <a:ea typeface="G마켓 산스 TTF Medium" panose="02000000000000000000" pitchFamily="2" charset="-127"/>
               </a:rPr>
-              <a:t>물리 시스템</a:t>
+              <a:t>게임 시스템</a:t>
             </a:r>
             <a:endParaRPr lang="ko-KR" altLang="en-US" sz="3200" dirty="0">
               <a:solidFill>
@@ -7312,14 +7468,14 @@
           <p:nvPr>
             <p:extLst>
               <p:ext uri="{D42A27DB-BD31-4B8C-83A1-F6EECF244321}">
-                <p14:modId xmlns:p14="http://schemas.microsoft.com/office/powerpoint/2010/main" val="984185358"/>
+                <p14:modId xmlns:p14="http://schemas.microsoft.com/office/powerpoint/2010/main" val="1245567961"/>
               </p:ext>
             </p:extLst>
           </p:nvPr>
         </p:nvGraphicFramePr>
         <p:xfrm>
           <a:off x="838200" y="2055803"/>
-          <a:ext cx="8171482" cy="4101998"/>
+          <a:ext cx="8171482" cy="3552215"/>
         </p:xfrm>
         <a:graphic>
           <a:graphicData uri="http://schemas.openxmlformats.org/drawingml/2006/table">
@@ -8005,7 +8161,7 @@
                           <a:latin typeface="G마켓 산스 TTF Medium" panose="02000000000000000000" pitchFamily="2" charset="-127"/>
                           <a:ea typeface="G마켓 산스 TTF Medium" panose="02000000000000000000" pitchFamily="2" charset="-127"/>
                         </a:rPr>
-                        <a:t>70%</a:t>
+                        <a:t>60%</a:t>
                       </a:r>
                       <a:endParaRPr lang="ko-KR" altLang="en-US" sz="1800" dirty="0">
                         <a:solidFill>
@@ -8947,7 +9103,7 @@
                           <a:latin typeface="G마켓 산스 TTF Medium" panose="02000000000000000000" pitchFamily="2" charset="-127"/>
                           <a:ea typeface="G마켓 산스 TTF Medium" panose="02000000000000000000" pitchFamily="2" charset="-127"/>
                         </a:rPr>
-                        <a:t>70%</a:t>
+                        <a:t>60%</a:t>
                       </a:r>
                       <a:endParaRPr lang="ko-KR" altLang="en-US" sz="1800" dirty="0">
                         <a:solidFill>
@@ -9486,7 +9642,7 @@
                           <a:latin typeface="G마켓 산스 TTF Medium" panose="02000000000000000000" pitchFamily="2" charset="-127"/>
                           <a:ea typeface="G마켓 산스 TTF Medium" panose="02000000000000000000" pitchFamily="2" charset="-127"/>
                         </a:rPr>
-                        <a:t>60%</a:t>
+                        <a:t>80%</a:t>
                       </a:r>
                       <a:endParaRPr lang="ko-KR" altLang="en-US" sz="1800" dirty="0">
                         <a:solidFill>
@@ -9951,7 +10107,7 @@
                           <a:latin typeface="G마켓 산스 TTF Medium" panose="02000000000000000000" pitchFamily="2" charset="-127"/>
                           <a:ea typeface="G마켓 산스 TTF Medium" panose="02000000000000000000" pitchFamily="2" charset="-127"/>
                         </a:rPr>
-                        <a:t>50%</a:t>
+                        <a:t>60%</a:t>
                       </a:r>
                       <a:endParaRPr lang="ko-KR" altLang="en-US" sz="1800" dirty="0">
                         <a:solidFill>
@@ -11073,7 +11229,7 @@
                           <a:latin typeface="G마켓 산스 TTF Medium" panose="02000000000000000000" pitchFamily="2" charset="-127"/>
                           <a:ea typeface="G마켓 산스 TTF Medium" panose="02000000000000000000" pitchFamily="2" charset="-127"/>
                         </a:rPr>
-                        <a:t>40%</a:t>
+                        <a:t>50%</a:t>
                       </a:r>
                       <a:endParaRPr lang="ko-KR" altLang="en-US" sz="1800" dirty="0">
                         <a:solidFill>
@@ -11267,477 +11423,6 @@
                 <a:extLst>
                   <a:ext uri="{0D108BD9-81ED-4DB2-BD59-A6C34878D82A}">
                     <a16:rowId xmlns:a16="http://schemas.microsoft.com/office/drawing/2014/main" val="965275426"/>
-                  </a:ext>
-                </a:extLst>
-              </a:tr>
-              <a:tr h="549783">
-                <a:tc>
-                  <a:txBody>
-                    <a:bodyPr/>
-                    <a:lstStyle/>
-                    <a:p>
-                      <a:pPr latinLnBrk="1"/>
-                      <a:r>
-                        <a:rPr lang="ko-KR" altLang="en-US" sz="1200" dirty="0">
-                          <a:solidFill>
-                            <a:schemeClr val="bg1"/>
-                          </a:solidFill>
-                          <a:latin typeface="G마켓 산스 TTF Medium" panose="02000000000000000000" pitchFamily="2" charset="-127"/>
-                          <a:ea typeface="G마켓 산스 TTF Medium" panose="02000000000000000000" pitchFamily="2" charset="-127"/>
-                        </a:rPr>
-                        <a:t>버그 테스트 및 수정</a:t>
-                      </a:r>
-                    </a:p>
-                  </a:txBody>
-                  <a:tcPr anchor="ctr">
-                    <a:lnL w="12700" cap="flat" cmpd="sng" algn="ctr">
-                      <a:solidFill>
-                        <a:schemeClr val="bg1"/>
-                      </a:solidFill>
-                      <a:prstDash val="solid"/>
-                      <a:round/>
-                      <a:headEnd type="none" w="med" len="med"/>
-                      <a:tailEnd type="none" w="med" len="med"/>
-                    </a:lnL>
-                    <a:lnR w="12700" cap="flat" cmpd="sng" algn="ctr">
-                      <a:solidFill>
-                        <a:schemeClr val="bg1"/>
-                      </a:solidFill>
-                      <a:prstDash val="solid"/>
-                      <a:round/>
-                      <a:headEnd type="none" w="med" len="med"/>
-                      <a:tailEnd type="none" w="med" len="med"/>
-                    </a:lnR>
-                    <a:lnT w="12700" cap="flat" cmpd="sng" algn="ctr">
-                      <a:solidFill>
-                        <a:schemeClr val="bg1"/>
-                      </a:solidFill>
-                      <a:prstDash val="solid"/>
-                      <a:round/>
-                      <a:headEnd type="none" w="med" len="med"/>
-                      <a:tailEnd type="none" w="med" len="med"/>
-                    </a:lnT>
-                    <a:lnB w="12700" cap="flat" cmpd="sng" algn="ctr">
-                      <a:solidFill>
-                        <a:schemeClr val="bg1"/>
-                      </a:solidFill>
-                      <a:prstDash val="solid"/>
-                      <a:round/>
-                      <a:headEnd type="none" w="med" len="med"/>
-                      <a:tailEnd type="none" w="med" len="med"/>
-                    </a:lnB>
-                    <a:lnTlToBr w="12700" cmpd="sng">
-                      <a:noFill/>
-                      <a:prstDash val="solid"/>
-                    </a:lnTlToBr>
-                    <a:lnBlToTr w="12700" cmpd="sng">
-                      <a:noFill/>
-                      <a:prstDash val="solid"/>
-                    </a:lnBlToTr>
-                    <a:noFill/>
-                  </a:tcPr>
-                </a:tc>
-                <a:tc>
-                  <a:txBody>
-                    <a:bodyPr/>
-                    <a:lstStyle/>
-                    <a:p>
-                      <a:pPr algn="ctr" latinLnBrk="1"/>
-                      <a:endParaRPr lang="ko-KR" altLang="en-US" sz="1800">
-                        <a:solidFill>
-                          <a:schemeClr val="tx1"/>
-                        </a:solidFill>
-                        <a:latin typeface="G마켓 산스 TTF Medium" panose="02000000000000000000" pitchFamily="2" charset="-127"/>
-                        <a:ea typeface="G마켓 산스 TTF Medium" panose="02000000000000000000" pitchFamily="2" charset="-127"/>
-                      </a:endParaRPr>
-                    </a:p>
-                  </a:txBody>
-                  <a:tcPr anchor="ctr">
-                    <a:lnL w="12700" cap="flat" cmpd="sng" algn="ctr">
-                      <a:solidFill>
-                        <a:schemeClr val="bg1"/>
-                      </a:solidFill>
-                      <a:prstDash val="solid"/>
-                      <a:round/>
-                      <a:headEnd type="none" w="med" len="med"/>
-                      <a:tailEnd type="none" w="med" len="med"/>
-                    </a:lnL>
-                    <a:lnR w="12700" cap="flat" cmpd="sng" algn="ctr">
-                      <a:solidFill>
-                        <a:schemeClr val="bg1"/>
-                      </a:solidFill>
-                      <a:prstDash val="solid"/>
-                      <a:round/>
-                      <a:headEnd type="none" w="med" len="med"/>
-                      <a:tailEnd type="none" w="med" len="med"/>
-                    </a:lnR>
-                    <a:lnT w="12700" cap="flat" cmpd="sng" algn="ctr">
-                      <a:solidFill>
-                        <a:schemeClr val="bg1"/>
-                      </a:solidFill>
-                      <a:prstDash val="solid"/>
-                      <a:round/>
-                      <a:headEnd type="none" w="med" len="med"/>
-                      <a:tailEnd type="none" w="med" len="med"/>
-                    </a:lnT>
-                    <a:lnB w="12700" cap="flat" cmpd="sng" algn="ctr">
-                      <a:solidFill>
-                        <a:schemeClr val="bg1"/>
-                      </a:solidFill>
-                      <a:prstDash val="solid"/>
-                      <a:round/>
-                      <a:headEnd type="none" w="med" len="med"/>
-                      <a:tailEnd type="none" w="med" len="med"/>
-                    </a:lnB>
-                    <a:lnTlToBr w="12700" cmpd="sng">
-                      <a:noFill/>
-                      <a:prstDash val="solid"/>
-                    </a:lnTlToBr>
-                    <a:lnBlToTr w="12700" cmpd="sng">
-                      <a:noFill/>
-                      <a:prstDash val="solid"/>
-                    </a:lnBlToTr>
-                    <a:noFill/>
-                  </a:tcPr>
-                </a:tc>
-                <a:tc>
-                  <a:txBody>
-                    <a:bodyPr/>
-                    <a:lstStyle/>
-                    <a:p>
-                      <a:pPr algn="ctr" latinLnBrk="1"/>
-                      <a:endParaRPr lang="ko-KR" altLang="en-US" sz="1800">
-                        <a:solidFill>
-                          <a:schemeClr val="tx1"/>
-                        </a:solidFill>
-                        <a:latin typeface="G마켓 산스 TTF Medium" panose="02000000000000000000" pitchFamily="2" charset="-127"/>
-                        <a:ea typeface="G마켓 산스 TTF Medium" panose="02000000000000000000" pitchFamily="2" charset="-127"/>
-                      </a:endParaRPr>
-                    </a:p>
-                  </a:txBody>
-                  <a:tcPr anchor="ctr">
-                    <a:lnL w="12700" cap="flat" cmpd="sng" algn="ctr">
-                      <a:solidFill>
-                        <a:schemeClr val="bg1"/>
-                      </a:solidFill>
-                      <a:prstDash val="solid"/>
-                      <a:round/>
-                      <a:headEnd type="none" w="med" len="med"/>
-                      <a:tailEnd type="none" w="med" len="med"/>
-                    </a:lnL>
-                    <a:lnR w="12700" cap="flat" cmpd="sng" algn="ctr">
-                      <a:solidFill>
-                        <a:schemeClr val="bg1"/>
-                      </a:solidFill>
-                      <a:prstDash val="solid"/>
-                      <a:round/>
-                      <a:headEnd type="none" w="med" len="med"/>
-                      <a:tailEnd type="none" w="med" len="med"/>
-                    </a:lnR>
-                    <a:lnT w="12700" cap="flat" cmpd="sng" algn="ctr">
-                      <a:solidFill>
-                        <a:schemeClr val="bg1"/>
-                      </a:solidFill>
-                      <a:prstDash val="solid"/>
-                      <a:round/>
-                      <a:headEnd type="none" w="med" len="med"/>
-                      <a:tailEnd type="none" w="med" len="med"/>
-                    </a:lnT>
-                    <a:lnB w="12700" cap="flat" cmpd="sng" algn="ctr">
-                      <a:solidFill>
-                        <a:schemeClr val="bg1"/>
-                      </a:solidFill>
-                      <a:prstDash val="solid"/>
-                      <a:round/>
-                      <a:headEnd type="none" w="med" len="med"/>
-                      <a:tailEnd type="none" w="med" len="med"/>
-                    </a:lnB>
-                    <a:lnTlToBr w="12700" cmpd="sng">
-                      <a:noFill/>
-                      <a:prstDash val="solid"/>
-                    </a:lnTlToBr>
-                    <a:lnBlToTr w="12700" cmpd="sng">
-                      <a:noFill/>
-                      <a:prstDash val="solid"/>
-                    </a:lnBlToTr>
-                    <a:noFill/>
-                  </a:tcPr>
-                </a:tc>
-                <a:tc gridSpan="4">
-                  <a:txBody>
-                    <a:bodyPr/>
-                    <a:lstStyle/>
-                    <a:p>
-                      <a:pPr algn="ctr" latinLnBrk="1"/>
-                      <a:endParaRPr lang="ko-KR" altLang="en-US" sz="1800" dirty="0">
-                        <a:solidFill>
-                          <a:schemeClr val="tx1"/>
-                        </a:solidFill>
-                        <a:latin typeface="G마켓 산스 TTF Medium" panose="02000000000000000000" pitchFamily="2" charset="-127"/>
-                        <a:ea typeface="G마켓 산스 TTF Medium" panose="02000000000000000000" pitchFamily="2" charset="-127"/>
-                      </a:endParaRPr>
-                    </a:p>
-                  </a:txBody>
-                  <a:tcPr anchor="ctr">
-                    <a:lnL w="12700" cap="flat" cmpd="sng" algn="ctr">
-                      <a:solidFill>
-                        <a:schemeClr val="bg1"/>
-                      </a:solidFill>
-                      <a:prstDash val="solid"/>
-                      <a:round/>
-                      <a:headEnd type="none" w="med" len="med"/>
-                      <a:tailEnd type="none" w="med" len="med"/>
-                    </a:lnL>
-                    <a:lnR w="12700" cap="flat" cmpd="sng" algn="ctr">
-                      <a:solidFill>
-                        <a:schemeClr val="bg1"/>
-                      </a:solidFill>
-                      <a:prstDash val="solid"/>
-                      <a:round/>
-                      <a:headEnd type="none" w="med" len="med"/>
-                      <a:tailEnd type="none" w="med" len="med"/>
-                    </a:lnR>
-                    <a:lnT w="12700" cap="flat" cmpd="sng" algn="ctr">
-                      <a:solidFill>
-                        <a:schemeClr val="bg1"/>
-                      </a:solidFill>
-                      <a:prstDash val="solid"/>
-                      <a:round/>
-                      <a:headEnd type="none" w="med" len="med"/>
-                      <a:tailEnd type="none" w="med" len="med"/>
-                    </a:lnT>
-                    <a:lnB w="12700" cap="flat" cmpd="sng" algn="ctr">
-                      <a:solidFill>
-                        <a:schemeClr val="bg1"/>
-                      </a:solidFill>
-                      <a:prstDash val="solid"/>
-                      <a:round/>
-                      <a:headEnd type="none" w="med" len="med"/>
-                      <a:tailEnd type="none" w="med" len="med"/>
-                    </a:lnB>
-                    <a:lnTlToBr w="12700" cmpd="sng">
-                      <a:noFill/>
-                      <a:prstDash val="solid"/>
-                    </a:lnTlToBr>
-                    <a:lnBlToTr w="12700" cmpd="sng">
-                      <a:noFill/>
-                      <a:prstDash val="solid"/>
-                    </a:lnBlToTr>
-                    <a:solidFill>
-                      <a:schemeClr val="accent6">
-                        <a:lumMod val="20000"/>
-                        <a:lumOff val="80000"/>
-                      </a:schemeClr>
-                    </a:solidFill>
-                  </a:tcPr>
-                </a:tc>
-                <a:tc hMerge="1">
-                  <a:txBody>
-                    <a:bodyPr/>
-                    <a:lstStyle/>
-                    <a:p>
-                      <a:pPr latinLnBrk="1"/>
-                      <a:endParaRPr lang="ko-KR" altLang="en-US" sz="1200" dirty="0">
-                        <a:solidFill>
-                          <a:schemeClr val="bg1"/>
-                        </a:solidFill>
-                        <a:latin typeface="G마켓 산스 TTF Medium" panose="02000000000000000000" pitchFamily="2" charset="-127"/>
-                        <a:ea typeface="G마켓 산스 TTF Medium" panose="02000000000000000000" pitchFamily="2" charset="-127"/>
-                      </a:endParaRPr>
-                    </a:p>
-                  </a:txBody>
-                  <a:tcPr>
-                    <a:lnL w="12700" cap="flat" cmpd="sng" algn="ctr">
-                      <a:solidFill>
-                        <a:schemeClr val="bg1"/>
-                      </a:solidFill>
-                      <a:prstDash val="solid"/>
-                      <a:round/>
-                      <a:headEnd type="none" w="med" len="med"/>
-                      <a:tailEnd type="none" w="med" len="med"/>
-                    </a:lnL>
-                    <a:lnR w="12700" cap="flat" cmpd="sng" algn="ctr">
-                      <a:solidFill>
-                        <a:schemeClr val="bg1"/>
-                      </a:solidFill>
-                      <a:prstDash val="solid"/>
-                      <a:round/>
-                      <a:headEnd type="none" w="med" len="med"/>
-                      <a:tailEnd type="none" w="med" len="med"/>
-                    </a:lnR>
-                    <a:lnT w="12700" cap="flat" cmpd="sng" algn="ctr">
-                      <a:solidFill>
-                        <a:schemeClr val="bg1"/>
-                      </a:solidFill>
-                      <a:prstDash val="solid"/>
-                      <a:round/>
-                      <a:headEnd type="none" w="med" len="med"/>
-                      <a:tailEnd type="none" w="med" len="med"/>
-                    </a:lnT>
-                    <a:lnB w="12700" cap="flat" cmpd="sng" algn="ctr">
-                      <a:solidFill>
-                        <a:schemeClr val="bg1"/>
-                      </a:solidFill>
-                      <a:prstDash val="solid"/>
-                      <a:round/>
-                      <a:headEnd type="none" w="med" len="med"/>
-                      <a:tailEnd type="none" w="med" len="med"/>
-                    </a:lnB>
-                    <a:lnTlToBr w="12700" cmpd="sng">
-                      <a:noFill/>
-                      <a:prstDash val="solid"/>
-                    </a:lnTlToBr>
-                    <a:lnBlToTr w="12700" cmpd="sng">
-                      <a:noFill/>
-                      <a:prstDash val="solid"/>
-                    </a:lnBlToTr>
-                    <a:solidFill>
-                      <a:schemeClr val="accent6">
-                        <a:lumMod val="20000"/>
-                        <a:lumOff val="80000"/>
-                      </a:schemeClr>
-                    </a:solidFill>
-                  </a:tcPr>
-                </a:tc>
-                <a:tc hMerge="1">
-                  <a:txBody>
-                    <a:bodyPr/>
-                    <a:lstStyle/>
-                    <a:p>
-                      <a:pPr latinLnBrk="1"/>
-                      <a:endParaRPr lang="ko-KR" altLang="en-US" sz="1200" dirty="0">
-                        <a:solidFill>
-                          <a:schemeClr val="bg1"/>
-                        </a:solidFill>
-                        <a:latin typeface="G마켓 산스 TTF Medium" panose="02000000000000000000" pitchFamily="2" charset="-127"/>
-                        <a:ea typeface="G마켓 산스 TTF Medium" panose="02000000000000000000" pitchFamily="2" charset="-127"/>
-                      </a:endParaRPr>
-                    </a:p>
-                  </a:txBody>
-                  <a:tcPr>
-                    <a:lnL w="12700" cap="flat" cmpd="sng" algn="ctr">
-                      <a:solidFill>
-                        <a:schemeClr val="bg1"/>
-                      </a:solidFill>
-                      <a:prstDash val="solid"/>
-                      <a:round/>
-                      <a:headEnd type="none" w="med" len="med"/>
-                      <a:tailEnd type="none" w="med" len="med"/>
-                    </a:lnL>
-                    <a:lnR w="12700" cap="flat" cmpd="sng" algn="ctr">
-                      <a:solidFill>
-                        <a:schemeClr val="bg1"/>
-                      </a:solidFill>
-                      <a:prstDash val="solid"/>
-                      <a:round/>
-                      <a:headEnd type="none" w="med" len="med"/>
-                      <a:tailEnd type="none" w="med" len="med"/>
-                    </a:lnR>
-                    <a:lnT w="12700" cap="flat" cmpd="sng" algn="ctr">
-                      <a:solidFill>
-                        <a:schemeClr val="bg1"/>
-                      </a:solidFill>
-                      <a:prstDash val="solid"/>
-                      <a:round/>
-                      <a:headEnd type="none" w="med" len="med"/>
-                      <a:tailEnd type="none" w="med" len="med"/>
-                    </a:lnT>
-                    <a:lnB w="12700" cap="flat" cmpd="sng" algn="ctr">
-                      <a:solidFill>
-                        <a:schemeClr val="bg1"/>
-                      </a:solidFill>
-                      <a:prstDash val="solid"/>
-                      <a:round/>
-                      <a:headEnd type="none" w="med" len="med"/>
-                      <a:tailEnd type="none" w="med" len="med"/>
-                    </a:lnB>
-                    <a:lnTlToBr w="12700" cmpd="sng">
-                      <a:noFill/>
-                      <a:prstDash val="solid"/>
-                    </a:lnTlToBr>
-                    <a:lnBlToTr w="12700" cmpd="sng">
-                      <a:noFill/>
-                      <a:prstDash val="solid"/>
-                    </a:lnBlToTr>
-                    <a:solidFill>
-                      <a:schemeClr val="accent6">
-                        <a:lumMod val="20000"/>
-                        <a:lumOff val="80000"/>
-                      </a:schemeClr>
-                    </a:solidFill>
-                  </a:tcPr>
-                </a:tc>
-                <a:tc hMerge="1">
-                  <a:txBody>
-                    <a:bodyPr/>
-                    <a:lstStyle/>
-                    <a:p>
-                      <a:pPr latinLnBrk="1"/>
-                      <a:endParaRPr lang="ko-KR" altLang="en-US" sz="1200" dirty="0">
-                        <a:solidFill>
-                          <a:schemeClr val="bg1"/>
-                        </a:solidFill>
-                        <a:latin typeface="G마켓 산스 TTF Medium" panose="02000000000000000000" pitchFamily="2" charset="-127"/>
-                        <a:ea typeface="G마켓 산스 TTF Medium" panose="02000000000000000000" pitchFamily="2" charset="-127"/>
-                      </a:endParaRPr>
-                    </a:p>
-                  </a:txBody>
-                  <a:tcPr>
-                    <a:lnL w="12700" cap="flat" cmpd="sng" algn="ctr">
-                      <a:solidFill>
-                        <a:schemeClr val="bg1"/>
-                      </a:solidFill>
-                      <a:prstDash val="solid"/>
-                      <a:round/>
-                      <a:headEnd type="none" w="med" len="med"/>
-                      <a:tailEnd type="none" w="med" len="med"/>
-                    </a:lnL>
-                    <a:lnR w="12700" cap="flat" cmpd="sng" algn="ctr">
-                      <a:solidFill>
-                        <a:schemeClr val="bg1"/>
-                      </a:solidFill>
-                      <a:prstDash val="solid"/>
-                      <a:round/>
-                      <a:headEnd type="none" w="med" len="med"/>
-                      <a:tailEnd type="none" w="med" len="med"/>
-                    </a:lnR>
-                    <a:lnT w="12700" cap="flat" cmpd="sng" algn="ctr">
-                      <a:solidFill>
-                        <a:schemeClr val="bg1"/>
-                      </a:solidFill>
-                      <a:prstDash val="solid"/>
-                      <a:round/>
-                      <a:headEnd type="none" w="med" len="med"/>
-                      <a:tailEnd type="none" w="med" len="med"/>
-                    </a:lnT>
-                    <a:lnB w="12700" cap="flat" cmpd="sng" algn="ctr">
-                      <a:solidFill>
-                        <a:schemeClr val="bg1"/>
-                      </a:solidFill>
-                      <a:prstDash val="solid"/>
-                      <a:round/>
-                      <a:headEnd type="none" w="med" len="med"/>
-                      <a:tailEnd type="none" w="med" len="med"/>
-                    </a:lnB>
-                    <a:lnTlToBr w="12700" cmpd="sng">
-                      <a:noFill/>
-                      <a:prstDash val="solid"/>
-                    </a:lnTlToBr>
-                    <a:lnBlToTr w="12700" cmpd="sng">
-                      <a:noFill/>
-                      <a:prstDash val="solid"/>
-                    </a:lnBlToTr>
-                    <a:solidFill>
-                      <a:schemeClr val="accent6">
-                        <a:lumMod val="20000"/>
-                        <a:lumOff val="80000"/>
-                      </a:schemeClr>
-                    </a:solidFill>
-                  </a:tcPr>
-                </a:tc>
-                <a:extLst>
-                  <a:ext uri="{0D108BD9-81ED-4DB2-BD59-A6C34878D82A}">
-                    <a16:rowId xmlns:a16="http://schemas.microsoft.com/office/drawing/2014/main" val="1745660695"/>
                   </a:ext>
                 </a:extLst>
               </a:tr>
@@ -12257,14 +11942,14 @@
           <p:nvPr>
             <p:extLst>
               <p:ext uri="{D42A27DB-BD31-4B8C-83A1-F6EECF244321}">
-                <p14:modId xmlns:p14="http://schemas.microsoft.com/office/powerpoint/2010/main" val="2558001470"/>
+                <p14:modId xmlns:p14="http://schemas.microsoft.com/office/powerpoint/2010/main" val="1383372649"/>
               </p:ext>
             </p:extLst>
           </p:nvPr>
         </p:nvGraphicFramePr>
         <p:xfrm>
           <a:off x="838200" y="2055803"/>
-          <a:ext cx="8171482" cy="4192295"/>
+          <a:ext cx="8171482" cy="3551072"/>
         </p:xfrm>
         <a:graphic>
           <a:graphicData uri="http://schemas.openxmlformats.org/drawingml/2006/table">
@@ -12943,7 +12628,7 @@
                     <a:p>
                       <a:pPr algn="ctr" latinLnBrk="1"/>
                       <a:r>
-                        <a:rPr lang="ko-KR" altLang="en-US" sz="1800">
+                        <a:rPr lang="ko-KR" altLang="en-US" sz="1600">
                           <a:solidFill>
                             <a:schemeClr val="tx1"/>
                           </a:solidFill>
@@ -12952,7 +12637,7 @@
                         </a:rPr>
                         <a:t>스테이지 기획</a:t>
                       </a:r>
-                      <a:endParaRPr lang="ko-KR" altLang="en-US" sz="1800" dirty="0">
+                      <a:endParaRPr lang="ko-KR" altLang="en-US" sz="1600" dirty="0">
                         <a:solidFill>
                           <a:schemeClr val="tx1"/>
                         </a:solidFill>
@@ -13082,7 +12767,7 @@
                     <a:lstStyle/>
                     <a:p>
                       <a:pPr algn="ctr" latinLnBrk="1"/>
-                      <a:endParaRPr lang="ko-KR" altLang="en-US" sz="1800" dirty="0">
+                      <a:endParaRPr lang="ko-KR" altLang="en-US" sz="1600" dirty="0">
                         <a:solidFill>
                           <a:schemeClr val="tx1"/>
                         </a:solidFill>
@@ -13145,7 +12830,7 @@
                     <a:lstStyle/>
                     <a:p>
                       <a:pPr algn="ctr" latinLnBrk="1"/>
-                      <a:endParaRPr lang="ko-KR" altLang="en-US" sz="1800">
+                      <a:endParaRPr lang="ko-KR" altLang="en-US" sz="1600">
                         <a:solidFill>
                           <a:schemeClr val="tx1"/>
                         </a:solidFill>
@@ -13208,7 +12893,7 @@
                     <a:lstStyle/>
                     <a:p>
                       <a:pPr algn="ctr" latinLnBrk="1"/>
-                      <a:endParaRPr lang="ko-KR" altLang="en-US" sz="1800">
+                      <a:endParaRPr lang="ko-KR" altLang="en-US" sz="1600">
                         <a:solidFill>
                           <a:schemeClr val="tx1"/>
                         </a:solidFill>
@@ -13418,16 +13103,16 @@
                     <a:p>
                       <a:pPr algn="ctr" latinLnBrk="1"/>
                       <a:r>
-                        <a:rPr lang="ko-KR" altLang="en-US" sz="1800">
+                        <a:rPr lang="ko-KR" altLang="en-US" sz="1600">
                           <a:solidFill>
                             <a:schemeClr val="tx1"/>
                           </a:solidFill>
                           <a:latin typeface="G마켓 산스 TTF Medium" panose="02000000000000000000" pitchFamily="2" charset="-127"/>
                           <a:ea typeface="G마켓 산스 TTF Medium" panose="02000000000000000000" pitchFamily="2" charset="-127"/>
                         </a:rPr>
-                        <a:t>부가 요소</a:t>
+                        <a:t>부가적인 오브젝트 제작</a:t>
                       </a:r>
-                      <a:endParaRPr lang="ko-KR" altLang="en-US" sz="1800" dirty="0">
+                      <a:endParaRPr lang="ko-KR" altLang="en-US" sz="1600" dirty="0">
                         <a:solidFill>
                           <a:schemeClr val="tx1"/>
                         </a:solidFill>
@@ -13622,7 +13307,7 @@
                     <a:lstStyle/>
                     <a:p>
                       <a:pPr algn="ctr" latinLnBrk="1"/>
-                      <a:endParaRPr lang="ko-KR" altLang="en-US" sz="1800" dirty="0">
+                      <a:endParaRPr lang="ko-KR" altLang="en-US" sz="1600" dirty="0">
                         <a:solidFill>
                           <a:schemeClr val="tx1"/>
                         </a:solidFill>
@@ -13685,7 +13370,7 @@
                     <a:lstStyle/>
                     <a:p>
                       <a:pPr algn="ctr" latinLnBrk="1"/>
-                      <a:endParaRPr lang="ko-KR" altLang="en-US" sz="1800">
+                      <a:endParaRPr lang="ko-KR" altLang="en-US" sz="1600">
                         <a:solidFill>
                           <a:schemeClr val="tx1"/>
                         </a:solidFill>
@@ -13819,7 +13504,7 @@
                     <a:p>
                       <a:pPr latinLnBrk="1"/>
                       <a:r>
-                        <a:rPr lang="ko-KR" altLang="en-US" sz="1200" dirty="0">
+                        <a:rPr lang="ko-KR" altLang="en-US" sz="1200">
                           <a:solidFill>
                             <a:schemeClr val="bg1"/>
                           </a:solidFill>
@@ -13828,6 +13513,13 @@
                         </a:rPr>
                         <a:t>각 물리적 기능 구현</a:t>
                       </a:r>
+                      <a:endParaRPr lang="ko-KR" altLang="en-US" sz="1200" dirty="0">
+                        <a:solidFill>
+                          <a:schemeClr val="bg1"/>
+                        </a:solidFill>
+                        <a:latin typeface="G마켓 산스 TTF Medium" panose="02000000000000000000" pitchFamily="2" charset="-127"/>
+                        <a:ea typeface="G마켓 산스 TTF Medium" panose="02000000000000000000" pitchFamily="2" charset="-127"/>
+                      </a:endParaRPr>
                     </a:p>
                   </a:txBody>
                   <a:tcPr anchor="ctr">
@@ -13884,17 +13576,7 @@
                     <a:lstStyle/>
                     <a:p>
                       <a:pPr algn="ctr" latinLnBrk="1"/>
-                      <a:r>
-                        <a:rPr lang="en-US" altLang="ko-KR" sz="1800">
-                          <a:solidFill>
-                            <a:schemeClr val="tx1"/>
-                          </a:solidFill>
-                          <a:latin typeface="G마켓 산스 TTF Medium" panose="02000000000000000000" pitchFamily="2" charset="-127"/>
-                          <a:ea typeface="G마켓 산스 TTF Medium" panose="02000000000000000000" pitchFamily="2" charset="-127"/>
-                        </a:rPr>
-                        <a:t>70%</a:t>
-                      </a:r>
-                      <a:endParaRPr lang="ko-KR" altLang="en-US" sz="1800" dirty="0">
+                      <a:endParaRPr lang="ko-KR" altLang="en-US" sz="1600" dirty="0">
                         <a:solidFill>
                           <a:schemeClr val="tx1"/>
                         </a:solidFill>
@@ -14098,7 +13780,7 @@
                     <a:lstStyle/>
                     <a:p>
                       <a:pPr algn="ctr" latinLnBrk="1"/>
-                      <a:endParaRPr lang="ko-KR" altLang="en-US" sz="1800" dirty="0">
+                      <a:endParaRPr lang="ko-KR" altLang="en-US" sz="1600" dirty="0">
                         <a:solidFill>
                           <a:schemeClr val="tx1"/>
                         </a:solidFill>
@@ -14161,7 +13843,7 @@
                     <a:lstStyle/>
                     <a:p>
                       <a:pPr algn="ctr" latinLnBrk="1"/>
-                      <a:endParaRPr lang="ko-KR" altLang="en-US" sz="1800">
+                      <a:endParaRPr lang="ko-KR" altLang="en-US" sz="1600">
                         <a:solidFill>
                           <a:schemeClr val="tx1"/>
                         </a:solidFill>
@@ -14360,7 +14042,7 @@
                     <a:lstStyle/>
                     <a:p>
                       <a:pPr algn="ctr" latinLnBrk="1"/>
-                      <a:endParaRPr lang="ko-KR" altLang="en-US" sz="1800" dirty="0">
+                      <a:endParaRPr lang="ko-KR" altLang="en-US" sz="1600" dirty="0">
                         <a:solidFill>
                           <a:schemeClr val="tx1"/>
                         </a:solidFill>
@@ -14424,7 +14106,7 @@
                     <a:p>
                       <a:pPr algn="ctr" latinLnBrk="1"/>
                       <a:r>
-                        <a:rPr lang="ko-KR" altLang="en-US" sz="1800">
+                        <a:rPr lang="ko-KR" altLang="en-US" sz="1600">
                           <a:solidFill>
                             <a:schemeClr val="tx1"/>
                           </a:solidFill>
@@ -14433,7 +14115,7 @@
                         </a:rPr>
                         <a:t>상호작용 모션</a:t>
                       </a:r>
-                      <a:endParaRPr lang="ko-KR" altLang="en-US" sz="1800" dirty="0">
+                      <a:endParaRPr lang="ko-KR" altLang="en-US" sz="1600" dirty="0">
                         <a:solidFill>
                           <a:schemeClr val="tx1"/>
                         </a:solidFill>
@@ -14563,7 +14245,7 @@
                     <a:lstStyle/>
                     <a:p>
                       <a:pPr algn="ctr" latinLnBrk="1"/>
-                      <a:endParaRPr lang="ko-KR" altLang="en-US" sz="1800" dirty="0">
+                      <a:endParaRPr lang="ko-KR" altLang="en-US" sz="1600" dirty="0">
                         <a:solidFill>
                           <a:schemeClr val="tx1"/>
                         </a:solidFill>
@@ -14626,7 +14308,7 @@
                     <a:lstStyle/>
                     <a:p>
                       <a:pPr algn="ctr" latinLnBrk="1"/>
-                      <a:endParaRPr lang="ko-KR" altLang="en-US" sz="1800">
+                      <a:endParaRPr lang="ko-KR" altLang="en-US" sz="1600">
                         <a:solidFill>
                           <a:schemeClr val="tx1"/>
                         </a:solidFill>
@@ -14825,7 +14507,7 @@
                     <a:lstStyle/>
                     <a:p>
                       <a:pPr algn="ctr" latinLnBrk="1"/>
-                      <a:endParaRPr lang="ko-KR" altLang="en-US" sz="1800" dirty="0">
+                      <a:endParaRPr lang="ko-KR" altLang="en-US" sz="1600" dirty="0">
                         <a:solidFill>
                           <a:schemeClr val="tx1"/>
                         </a:solidFill>
@@ -14889,36 +14571,16 @@
                     <a:p>
                       <a:pPr algn="ctr" latinLnBrk="1"/>
                       <a:r>
-                        <a:rPr lang="ko-KR" altLang="en-US" sz="1800">
+                        <a:rPr lang="ko-KR" altLang="en-US" sz="1600">
                           <a:solidFill>
                             <a:schemeClr val="tx1"/>
                           </a:solidFill>
                           <a:latin typeface="G마켓 산스 TTF Medium" panose="02000000000000000000" pitchFamily="2" charset="-127"/>
                           <a:ea typeface="G마켓 산스 TTF Medium" panose="02000000000000000000" pitchFamily="2" charset="-127"/>
                         </a:rPr>
-                        <a:t>자석 관련 기능</a:t>
+                        <a:t>다양한 오브젝트의 물리 파라미터 계산</a:t>
                       </a:r>
-                      <a:r>
-                        <a:rPr lang="en-US" altLang="ko-KR" sz="1800">
-                          <a:solidFill>
-                            <a:schemeClr val="tx1"/>
-                          </a:solidFill>
-                          <a:latin typeface="G마켓 산스 TTF Medium" panose="02000000000000000000" pitchFamily="2" charset="-127"/>
-                          <a:ea typeface="G마켓 산스 TTF Medium" panose="02000000000000000000" pitchFamily="2" charset="-127"/>
-                        </a:rPr>
-                        <a:t>, </a:t>
-                      </a:r>
-                      <a:r>
-                        <a:rPr lang="ko-KR" altLang="en-US" sz="1800">
-                          <a:solidFill>
-                            <a:schemeClr val="tx1"/>
-                          </a:solidFill>
-                          <a:latin typeface="G마켓 산스 TTF Medium" panose="02000000000000000000" pitchFamily="2" charset="-127"/>
-                          <a:ea typeface="G마켓 산스 TTF Medium" panose="02000000000000000000" pitchFamily="2" charset="-127"/>
-                        </a:rPr>
-                        <a:t>머티리얼 변경 시스템</a:t>
-                      </a:r>
-                      <a:endParaRPr lang="ko-KR" altLang="en-US" sz="1800" dirty="0">
+                      <a:endParaRPr lang="ko-KR" altLang="en-US" sz="1600" dirty="0">
                         <a:solidFill>
                           <a:schemeClr val="tx1"/>
                         </a:solidFill>
@@ -15353,7 +15015,7 @@
                     <a:lstStyle/>
                     <a:p>
                       <a:pPr algn="ctr" latinLnBrk="1"/>
-                      <a:endParaRPr lang="ko-KR" altLang="en-US" sz="1800" dirty="0">
+                      <a:endParaRPr lang="ko-KR" altLang="en-US" sz="1600" dirty="0">
                         <a:solidFill>
                           <a:schemeClr val="tx1"/>
                         </a:solidFill>
@@ -15416,7 +15078,7 @@
                     <a:lstStyle/>
                     <a:p>
                       <a:pPr algn="ctr" latinLnBrk="1"/>
-                      <a:endParaRPr lang="ko-KR" altLang="en-US" sz="1800">
+                      <a:endParaRPr lang="ko-KR" altLang="en-US" sz="1600">
                         <a:solidFill>
                           <a:schemeClr val="tx1"/>
                         </a:solidFill>
@@ -15479,7 +15141,7 @@
                     <a:lstStyle/>
                     <a:p>
                       <a:pPr algn="ctr" latinLnBrk="1"/>
-                      <a:endParaRPr lang="ko-KR" altLang="en-US" sz="1800">
+                      <a:endParaRPr lang="ko-KR" altLang="en-US" sz="1600">
                         <a:solidFill>
                           <a:schemeClr val="tx1"/>
                         </a:solidFill>
@@ -15542,7 +15204,7 @@
                     <a:lstStyle/>
                     <a:p>
                       <a:pPr algn="ctr" latinLnBrk="1"/>
-                      <a:endParaRPr lang="ko-KR" altLang="en-US" sz="1800" dirty="0">
+                      <a:endParaRPr lang="ko-KR" altLang="en-US" sz="1600" dirty="0">
                         <a:solidFill>
                           <a:schemeClr val="tx1"/>
                         </a:solidFill>
@@ -15606,7 +15268,7 @@
                     <a:p>
                       <a:pPr algn="ctr" latinLnBrk="1"/>
                       <a:r>
-                        <a:rPr lang="ko-KR" altLang="en-US" sz="1800">
+                        <a:rPr lang="ko-KR" altLang="en-US" sz="1600">
                           <a:solidFill>
                             <a:schemeClr val="tx1"/>
                           </a:solidFill>
@@ -15615,7 +15277,7 @@
                         </a:rPr>
                         <a:t>튜토리얼 외</a:t>
                       </a:r>
-                      <a:endParaRPr lang="en-US" altLang="ko-KR" sz="1800">
+                      <a:endParaRPr lang="en-US" altLang="ko-KR" sz="1600">
                         <a:solidFill>
                           <a:schemeClr val="tx1"/>
                         </a:solidFill>
@@ -15626,7 +15288,7 @@
                     <a:p>
                       <a:pPr algn="ctr" latinLnBrk="1"/>
                       <a:r>
-                        <a:rPr lang="ko-KR" altLang="en-US" sz="1800">
+                        <a:rPr lang="ko-KR" altLang="en-US" sz="1600">
                           <a:solidFill>
                             <a:schemeClr val="tx1"/>
                           </a:solidFill>
@@ -15635,7 +15297,7 @@
                         </a:rPr>
                         <a:t>스테이지</a:t>
                       </a:r>
-                      <a:endParaRPr lang="ko-KR" altLang="en-US" sz="1800" dirty="0">
+                      <a:endParaRPr lang="ko-KR" altLang="en-US" sz="1600" dirty="0">
                         <a:solidFill>
                           <a:schemeClr val="tx1"/>
                         </a:solidFill>
@@ -15861,7 +15523,7 @@
                     <a:lstStyle/>
                     <a:p>
                       <a:pPr algn="ctr" latinLnBrk="1"/>
-                      <a:endParaRPr lang="ko-KR" altLang="en-US" sz="1800">
+                      <a:endParaRPr lang="ko-KR" altLang="en-US" sz="1600">
                         <a:solidFill>
                           <a:schemeClr val="tx1"/>
                         </a:solidFill>
@@ -15924,7 +15586,7 @@
                     <a:lstStyle/>
                     <a:p>
                       <a:pPr algn="ctr" latinLnBrk="1"/>
-                      <a:endParaRPr lang="ko-KR" altLang="en-US" sz="1800">
+                      <a:endParaRPr lang="ko-KR" altLang="en-US" sz="1600">
                         <a:solidFill>
                           <a:schemeClr val="tx1"/>
                         </a:solidFill>
@@ -15987,7 +15649,7 @@
                     <a:lstStyle/>
                     <a:p>
                       <a:pPr algn="ctr" latinLnBrk="1"/>
-                      <a:endParaRPr lang="ko-KR" altLang="en-US" sz="1800" dirty="0">
+                      <a:endParaRPr lang="ko-KR" altLang="en-US" sz="1600" dirty="0">
                         <a:solidFill>
                           <a:schemeClr val="tx1"/>
                         </a:solidFill>
@@ -16051,36 +15713,36 @@
                     <a:p>
                       <a:pPr algn="ctr" latinLnBrk="1"/>
                       <a:r>
-                        <a:rPr lang="ko-KR" altLang="en-US" sz="1800">
+                        <a:rPr lang="ko-KR" altLang="en-US" sz="1600">
                           <a:solidFill>
                             <a:schemeClr val="tx1"/>
                           </a:solidFill>
                           <a:latin typeface="G마켓 산스 TTF Medium" panose="02000000000000000000" pitchFamily="2" charset="-127"/>
                           <a:ea typeface="G마켓 산스 TTF Medium" panose="02000000000000000000" pitchFamily="2" charset="-127"/>
                         </a:rPr>
-                        <a:t>열화상 </a:t>
+                        <a:t>사운드 및 </a:t>
                       </a:r>
                       <a:r>
-                        <a:rPr lang="en-US" altLang="ko-KR" sz="1800">
+                        <a:rPr lang="en-US" altLang="ko-KR" sz="1600">
                           <a:solidFill>
                             <a:schemeClr val="tx1"/>
                           </a:solidFill>
                           <a:latin typeface="G마켓 산스 TTF Medium" panose="02000000000000000000" pitchFamily="2" charset="-127"/>
                           <a:ea typeface="G마켓 산스 TTF Medium" panose="02000000000000000000" pitchFamily="2" charset="-127"/>
                         </a:rPr>
-                        <a:t>/ </a:t>
+                        <a:t>UI </a:t>
                       </a:r>
                       <a:r>
-                        <a:rPr lang="ko-KR" altLang="en-US" sz="1800">
+                        <a:rPr lang="ko-KR" altLang="en-US" sz="1600">
                           <a:solidFill>
                             <a:schemeClr val="tx1"/>
                           </a:solidFill>
                           <a:latin typeface="G마켓 산스 TTF Medium" panose="02000000000000000000" pitchFamily="2" charset="-127"/>
                           <a:ea typeface="G마켓 산스 TTF Medium" panose="02000000000000000000" pitchFamily="2" charset="-127"/>
                         </a:rPr>
-                        <a:t>자기장 이펙트</a:t>
+                        <a:t>디자인</a:t>
                       </a:r>
-                      <a:endParaRPr lang="ko-KR" altLang="en-US" sz="1800" dirty="0">
+                      <a:endParaRPr lang="ko-KR" altLang="en-US" sz="1600" dirty="0">
                         <a:solidFill>
                           <a:schemeClr val="tx1"/>
                         </a:solidFill>
@@ -16272,477 +15934,6 @@
                 <a:extLst>
                   <a:ext uri="{0D108BD9-81ED-4DB2-BD59-A6C34878D82A}">
                     <a16:rowId xmlns:a16="http://schemas.microsoft.com/office/drawing/2014/main" val="965275426"/>
-                  </a:ext>
-                </a:extLst>
-              </a:tr>
-              <a:tr h="549783">
-                <a:tc>
-                  <a:txBody>
-                    <a:bodyPr/>
-                    <a:lstStyle/>
-                    <a:p>
-                      <a:pPr latinLnBrk="1"/>
-                      <a:r>
-                        <a:rPr lang="ko-KR" altLang="en-US" sz="1200" dirty="0">
-                          <a:solidFill>
-                            <a:schemeClr val="bg1"/>
-                          </a:solidFill>
-                          <a:latin typeface="G마켓 산스 TTF Medium" panose="02000000000000000000" pitchFamily="2" charset="-127"/>
-                          <a:ea typeface="G마켓 산스 TTF Medium" panose="02000000000000000000" pitchFamily="2" charset="-127"/>
-                        </a:rPr>
-                        <a:t>버그 테스트 및 수정</a:t>
-                      </a:r>
-                    </a:p>
-                  </a:txBody>
-                  <a:tcPr anchor="ctr">
-                    <a:lnL w="12700" cap="flat" cmpd="sng" algn="ctr">
-                      <a:solidFill>
-                        <a:schemeClr val="bg1"/>
-                      </a:solidFill>
-                      <a:prstDash val="solid"/>
-                      <a:round/>
-                      <a:headEnd type="none" w="med" len="med"/>
-                      <a:tailEnd type="none" w="med" len="med"/>
-                    </a:lnL>
-                    <a:lnR w="12700" cap="flat" cmpd="sng" algn="ctr">
-                      <a:solidFill>
-                        <a:schemeClr val="bg1"/>
-                      </a:solidFill>
-                      <a:prstDash val="solid"/>
-                      <a:round/>
-                      <a:headEnd type="none" w="med" len="med"/>
-                      <a:tailEnd type="none" w="med" len="med"/>
-                    </a:lnR>
-                    <a:lnT w="12700" cap="flat" cmpd="sng" algn="ctr">
-                      <a:solidFill>
-                        <a:schemeClr val="bg1"/>
-                      </a:solidFill>
-                      <a:prstDash val="solid"/>
-                      <a:round/>
-                      <a:headEnd type="none" w="med" len="med"/>
-                      <a:tailEnd type="none" w="med" len="med"/>
-                    </a:lnT>
-                    <a:lnB w="12700" cap="flat" cmpd="sng" algn="ctr">
-                      <a:solidFill>
-                        <a:schemeClr val="bg1"/>
-                      </a:solidFill>
-                      <a:prstDash val="solid"/>
-                      <a:round/>
-                      <a:headEnd type="none" w="med" len="med"/>
-                      <a:tailEnd type="none" w="med" len="med"/>
-                    </a:lnB>
-                    <a:lnTlToBr w="12700" cmpd="sng">
-                      <a:noFill/>
-                      <a:prstDash val="solid"/>
-                    </a:lnTlToBr>
-                    <a:lnBlToTr w="12700" cmpd="sng">
-                      <a:noFill/>
-                      <a:prstDash val="solid"/>
-                    </a:lnBlToTr>
-                    <a:noFill/>
-                  </a:tcPr>
-                </a:tc>
-                <a:tc>
-                  <a:txBody>
-                    <a:bodyPr/>
-                    <a:lstStyle/>
-                    <a:p>
-                      <a:pPr algn="ctr" latinLnBrk="1"/>
-                      <a:endParaRPr lang="ko-KR" altLang="en-US" sz="1800">
-                        <a:solidFill>
-                          <a:schemeClr val="tx1"/>
-                        </a:solidFill>
-                        <a:latin typeface="G마켓 산스 TTF Medium" panose="02000000000000000000" pitchFamily="2" charset="-127"/>
-                        <a:ea typeface="G마켓 산스 TTF Medium" panose="02000000000000000000" pitchFamily="2" charset="-127"/>
-                      </a:endParaRPr>
-                    </a:p>
-                  </a:txBody>
-                  <a:tcPr anchor="ctr">
-                    <a:lnL w="12700" cap="flat" cmpd="sng" algn="ctr">
-                      <a:solidFill>
-                        <a:schemeClr val="bg1"/>
-                      </a:solidFill>
-                      <a:prstDash val="solid"/>
-                      <a:round/>
-                      <a:headEnd type="none" w="med" len="med"/>
-                      <a:tailEnd type="none" w="med" len="med"/>
-                    </a:lnL>
-                    <a:lnR w="12700" cap="flat" cmpd="sng" algn="ctr">
-                      <a:solidFill>
-                        <a:schemeClr val="bg1"/>
-                      </a:solidFill>
-                      <a:prstDash val="solid"/>
-                      <a:round/>
-                      <a:headEnd type="none" w="med" len="med"/>
-                      <a:tailEnd type="none" w="med" len="med"/>
-                    </a:lnR>
-                    <a:lnT w="12700" cap="flat" cmpd="sng" algn="ctr">
-                      <a:solidFill>
-                        <a:schemeClr val="bg1"/>
-                      </a:solidFill>
-                      <a:prstDash val="solid"/>
-                      <a:round/>
-                      <a:headEnd type="none" w="med" len="med"/>
-                      <a:tailEnd type="none" w="med" len="med"/>
-                    </a:lnT>
-                    <a:lnB w="12700" cap="flat" cmpd="sng" algn="ctr">
-                      <a:solidFill>
-                        <a:schemeClr val="bg1"/>
-                      </a:solidFill>
-                      <a:prstDash val="solid"/>
-                      <a:round/>
-                      <a:headEnd type="none" w="med" len="med"/>
-                      <a:tailEnd type="none" w="med" len="med"/>
-                    </a:lnB>
-                    <a:lnTlToBr w="12700" cmpd="sng">
-                      <a:noFill/>
-                      <a:prstDash val="solid"/>
-                    </a:lnTlToBr>
-                    <a:lnBlToTr w="12700" cmpd="sng">
-                      <a:noFill/>
-                      <a:prstDash val="solid"/>
-                    </a:lnBlToTr>
-                    <a:noFill/>
-                  </a:tcPr>
-                </a:tc>
-                <a:tc>
-                  <a:txBody>
-                    <a:bodyPr/>
-                    <a:lstStyle/>
-                    <a:p>
-                      <a:pPr algn="ctr" latinLnBrk="1"/>
-                      <a:endParaRPr lang="ko-KR" altLang="en-US" sz="1800">
-                        <a:solidFill>
-                          <a:schemeClr val="tx1"/>
-                        </a:solidFill>
-                        <a:latin typeface="G마켓 산스 TTF Medium" panose="02000000000000000000" pitchFamily="2" charset="-127"/>
-                        <a:ea typeface="G마켓 산스 TTF Medium" panose="02000000000000000000" pitchFamily="2" charset="-127"/>
-                      </a:endParaRPr>
-                    </a:p>
-                  </a:txBody>
-                  <a:tcPr anchor="ctr">
-                    <a:lnL w="12700" cap="flat" cmpd="sng" algn="ctr">
-                      <a:solidFill>
-                        <a:schemeClr val="bg1"/>
-                      </a:solidFill>
-                      <a:prstDash val="solid"/>
-                      <a:round/>
-                      <a:headEnd type="none" w="med" len="med"/>
-                      <a:tailEnd type="none" w="med" len="med"/>
-                    </a:lnL>
-                    <a:lnR w="12700" cap="flat" cmpd="sng" algn="ctr">
-                      <a:solidFill>
-                        <a:schemeClr val="bg1"/>
-                      </a:solidFill>
-                      <a:prstDash val="solid"/>
-                      <a:round/>
-                      <a:headEnd type="none" w="med" len="med"/>
-                      <a:tailEnd type="none" w="med" len="med"/>
-                    </a:lnR>
-                    <a:lnT w="12700" cap="flat" cmpd="sng" algn="ctr">
-                      <a:solidFill>
-                        <a:schemeClr val="bg1"/>
-                      </a:solidFill>
-                      <a:prstDash val="solid"/>
-                      <a:round/>
-                      <a:headEnd type="none" w="med" len="med"/>
-                      <a:tailEnd type="none" w="med" len="med"/>
-                    </a:lnT>
-                    <a:lnB w="12700" cap="flat" cmpd="sng" algn="ctr">
-                      <a:solidFill>
-                        <a:schemeClr val="bg1"/>
-                      </a:solidFill>
-                      <a:prstDash val="solid"/>
-                      <a:round/>
-                      <a:headEnd type="none" w="med" len="med"/>
-                      <a:tailEnd type="none" w="med" len="med"/>
-                    </a:lnB>
-                    <a:lnTlToBr w="12700" cmpd="sng">
-                      <a:noFill/>
-                      <a:prstDash val="solid"/>
-                    </a:lnTlToBr>
-                    <a:lnBlToTr w="12700" cmpd="sng">
-                      <a:noFill/>
-                      <a:prstDash val="solid"/>
-                    </a:lnBlToTr>
-                    <a:noFill/>
-                  </a:tcPr>
-                </a:tc>
-                <a:tc gridSpan="4">
-                  <a:txBody>
-                    <a:bodyPr/>
-                    <a:lstStyle/>
-                    <a:p>
-                      <a:pPr algn="ctr" latinLnBrk="1"/>
-                      <a:endParaRPr lang="ko-KR" altLang="en-US" sz="1800" dirty="0">
-                        <a:solidFill>
-                          <a:schemeClr val="tx1"/>
-                        </a:solidFill>
-                        <a:latin typeface="G마켓 산스 TTF Medium" panose="02000000000000000000" pitchFamily="2" charset="-127"/>
-                        <a:ea typeface="G마켓 산스 TTF Medium" panose="02000000000000000000" pitchFamily="2" charset="-127"/>
-                      </a:endParaRPr>
-                    </a:p>
-                  </a:txBody>
-                  <a:tcPr anchor="ctr">
-                    <a:lnL w="12700" cap="flat" cmpd="sng" algn="ctr">
-                      <a:solidFill>
-                        <a:schemeClr val="bg1"/>
-                      </a:solidFill>
-                      <a:prstDash val="solid"/>
-                      <a:round/>
-                      <a:headEnd type="none" w="med" len="med"/>
-                      <a:tailEnd type="none" w="med" len="med"/>
-                    </a:lnL>
-                    <a:lnR w="12700" cap="flat" cmpd="sng" algn="ctr">
-                      <a:solidFill>
-                        <a:schemeClr val="bg1"/>
-                      </a:solidFill>
-                      <a:prstDash val="solid"/>
-                      <a:round/>
-                      <a:headEnd type="none" w="med" len="med"/>
-                      <a:tailEnd type="none" w="med" len="med"/>
-                    </a:lnR>
-                    <a:lnT w="12700" cap="flat" cmpd="sng" algn="ctr">
-                      <a:solidFill>
-                        <a:schemeClr val="bg1"/>
-                      </a:solidFill>
-                      <a:prstDash val="solid"/>
-                      <a:round/>
-                      <a:headEnd type="none" w="med" len="med"/>
-                      <a:tailEnd type="none" w="med" len="med"/>
-                    </a:lnT>
-                    <a:lnB w="12700" cap="flat" cmpd="sng" algn="ctr">
-                      <a:solidFill>
-                        <a:schemeClr val="bg1"/>
-                      </a:solidFill>
-                      <a:prstDash val="solid"/>
-                      <a:round/>
-                      <a:headEnd type="none" w="med" len="med"/>
-                      <a:tailEnd type="none" w="med" len="med"/>
-                    </a:lnB>
-                    <a:lnTlToBr w="12700" cmpd="sng">
-                      <a:noFill/>
-                      <a:prstDash val="solid"/>
-                    </a:lnTlToBr>
-                    <a:lnBlToTr w="12700" cmpd="sng">
-                      <a:noFill/>
-                      <a:prstDash val="solid"/>
-                    </a:lnBlToTr>
-                    <a:solidFill>
-                      <a:schemeClr val="accent6">
-                        <a:lumMod val="20000"/>
-                        <a:lumOff val="80000"/>
-                      </a:schemeClr>
-                    </a:solidFill>
-                  </a:tcPr>
-                </a:tc>
-                <a:tc hMerge="1">
-                  <a:txBody>
-                    <a:bodyPr/>
-                    <a:lstStyle/>
-                    <a:p>
-                      <a:pPr latinLnBrk="1"/>
-                      <a:endParaRPr lang="ko-KR" altLang="en-US" sz="1200" dirty="0">
-                        <a:solidFill>
-                          <a:schemeClr val="bg1"/>
-                        </a:solidFill>
-                        <a:latin typeface="G마켓 산스 TTF Medium" panose="02000000000000000000" pitchFamily="2" charset="-127"/>
-                        <a:ea typeface="G마켓 산스 TTF Medium" panose="02000000000000000000" pitchFamily="2" charset="-127"/>
-                      </a:endParaRPr>
-                    </a:p>
-                  </a:txBody>
-                  <a:tcPr>
-                    <a:lnL w="12700" cap="flat" cmpd="sng" algn="ctr">
-                      <a:solidFill>
-                        <a:schemeClr val="bg1"/>
-                      </a:solidFill>
-                      <a:prstDash val="solid"/>
-                      <a:round/>
-                      <a:headEnd type="none" w="med" len="med"/>
-                      <a:tailEnd type="none" w="med" len="med"/>
-                    </a:lnL>
-                    <a:lnR w="12700" cap="flat" cmpd="sng" algn="ctr">
-                      <a:solidFill>
-                        <a:schemeClr val="bg1"/>
-                      </a:solidFill>
-                      <a:prstDash val="solid"/>
-                      <a:round/>
-                      <a:headEnd type="none" w="med" len="med"/>
-                      <a:tailEnd type="none" w="med" len="med"/>
-                    </a:lnR>
-                    <a:lnT w="12700" cap="flat" cmpd="sng" algn="ctr">
-                      <a:solidFill>
-                        <a:schemeClr val="bg1"/>
-                      </a:solidFill>
-                      <a:prstDash val="solid"/>
-                      <a:round/>
-                      <a:headEnd type="none" w="med" len="med"/>
-                      <a:tailEnd type="none" w="med" len="med"/>
-                    </a:lnT>
-                    <a:lnB w="12700" cap="flat" cmpd="sng" algn="ctr">
-                      <a:solidFill>
-                        <a:schemeClr val="bg1"/>
-                      </a:solidFill>
-                      <a:prstDash val="solid"/>
-                      <a:round/>
-                      <a:headEnd type="none" w="med" len="med"/>
-                      <a:tailEnd type="none" w="med" len="med"/>
-                    </a:lnB>
-                    <a:lnTlToBr w="12700" cmpd="sng">
-                      <a:noFill/>
-                      <a:prstDash val="solid"/>
-                    </a:lnTlToBr>
-                    <a:lnBlToTr w="12700" cmpd="sng">
-                      <a:noFill/>
-                      <a:prstDash val="solid"/>
-                    </a:lnBlToTr>
-                    <a:solidFill>
-                      <a:schemeClr val="accent6">
-                        <a:lumMod val="20000"/>
-                        <a:lumOff val="80000"/>
-                      </a:schemeClr>
-                    </a:solidFill>
-                  </a:tcPr>
-                </a:tc>
-                <a:tc hMerge="1">
-                  <a:txBody>
-                    <a:bodyPr/>
-                    <a:lstStyle/>
-                    <a:p>
-                      <a:pPr latinLnBrk="1"/>
-                      <a:endParaRPr lang="ko-KR" altLang="en-US" sz="1200" dirty="0">
-                        <a:solidFill>
-                          <a:schemeClr val="bg1"/>
-                        </a:solidFill>
-                        <a:latin typeface="G마켓 산스 TTF Medium" panose="02000000000000000000" pitchFamily="2" charset="-127"/>
-                        <a:ea typeface="G마켓 산스 TTF Medium" panose="02000000000000000000" pitchFamily="2" charset="-127"/>
-                      </a:endParaRPr>
-                    </a:p>
-                  </a:txBody>
-                  <a:tcPr>
-                    <a:lnL w="12700" cap="flat" cmpd="sng" algn="ctr">
-                      <a:solidFill>
-                        <a:schemeClr val="bg1"/>
-                      </a:solidFill>
-                      <a:prstDash val="solid"/>
-                      <a:round/>
-                      <a:headEnd type="none" w="med" len="med"/>
-                      <a:tailEnd type="none" w="med" len="med"/>
-                    </a:lnL>
-                    <a:lnR w="12700" cap="flat" cmpd="sng" algn="ctr">
-                      <a:solidFill>
-                        <a:schemeClr val="bg1"/>
-                      </a:solidFill>
-                      <a:prstDash val="solid"/>
-                      <a:round/>
-                      <a:headEnd type="none" w="med" len="med"/>
-                      <a:tailEnd type="none" w="med" len="med"/>
-                    </a:lnR>
-                    <a:lnT w="12700" cap="flat" cmpd="sng" algn="ctr">
-                      <a:solidFill>
-                        <a:schemeClr val="bg1"/>
-                      </a:solidFill>
-                      <a:prstDash val="solid"/>
-                      <a:round/>
-                      <a:headEnd type="none" w="med" len="med"/>
-                      <a:tailEnd type="none" w="med" len="med"/>
-                    </a:lnT>
-                    <a:lnB w="12700" cap="flat" cmpd="sng" algn="ctr">
-                      <a:solidFill>
-                        <a:schemeClr val="bg1"/>
-                      </a:solidFill>
-                      <a:prstDash val="solid"/>
-                      <a:round/>
-                      <a:headEnd type="none" w="med" len="med"/>
-                      <a:tailEnd type="none" w="med" len="med"/>
-                    </a:lnB>
-                    <a:lnTlToBr w="12700" cmpd="sng">
-                      <a:noFill/>
-                      <a:prstDash val="solid"/>
-                    </a:lnTlToBr>
-                    <a:lnBlToTr w="12700" cmpd="sng">
-                      <a:noFill/>
-                      <a:prstDash val="solid"/>
-                    </a:lnBlToTr>
-                    <a:solidFill>
-                      <a:schemeClr val="accent6">
-                        <a:lumMod val="20000"/>
-                        <a:lumOff val="80000"/>
-                      </a:schemeClr>
-                    </a:solidFill>
-                  </a:tcPr>
-                </a:tc>
-                <a:tc hMerge="1">
-                  <a:txBody>
-                    <a:bodyPr/>
-                    <a:lstStyle/>
-                    <a:p>
-                      <a:pPr latinLnBrk="1"/>
-                      <a:endParaRPr lang="ko-KR" altLang="en-US" sz="1200" dirty="0">
-                        <a:solidFill>
-                          <a:schemeClr val="bg1"/>
-                        </a:solidFill>
-                        <a:latin typeface="G마켓 산스 TTF Medium" panose="02000000000000000000" pitchFamily="2" charset="-127"/>
-                        <a:ea typeface="G마켓 산스 TTF Medium" panose="02000000000000000000" pitchFamily="2" charset="-127"/>
-                      </a:endParaRPr>
-                    </a:p>
-                  </a:txBody>
-                  <a:tcPr>
-                    <a:lnL w="12700" cap="flat" cmpd="sng" algn="ctr">
-                      <a:solidFill>
-                        <a:schemeClr val="bg1"/>
-                      </a:solidFill>
-                      <a:prstDash val="solid"/>
-                      <a:round/>
-                      <a:headEnd type="none" w="med" len="med"/>
-                      <a:tailEnd type="none" w="med" len="med"/>
-                    </a:lnL>
-                    <a:lnR w="12700" cap="flat" cmpd="sng" algn="ctr">
-                      <a:solidFill>
-                        <a:schemeClr val="bg1"/>
-                      </a:solidFill>
-                      <a:prstDash val="solid"/>
-                      <a:round/>
-                      <a:headEnd type="none" w="med" len="med"/>
-                      <a:tailEnd type="none" w="med" len="med"/>
-                    </a:lnR>
-                    <a:lnT w="12700" cap="flat" cmpd="sng" algn="ctr">
-                      <a:solidFill>
-                        <a:schemeClr val="bg1"/>
-                      </a:solidFill>
-                      <a:prstDash val="solid"/>
-                      <a:round/>
-                      <a:headEnd type="none" w="med" len="med"/>
-                      <a:tailEnd type="none" w="med" len="med"/>
-                    </a:lnT>
-                    <a:lnB w="12700" cap="flat" cmpd="sng" algn="ctr">
-                      <a:solidFill>
-                        <a:schemeClr val="bg1"/>
-                      </a:solidFill>
-                      <a:prstDash val="solid"/>
-                      <a:round/>
-                      <a:headEnd type="none" w="med" len="med"/>
-                      <a:tailEnd type="none" w="med" len="med"/>
-                    </a:lnB>
-                    <a:lnTlToBr w="12700" cmpd="sng">
-                      <a:noFill/>
-                      <a:prstDash val="solid"/>
-                    </a:lnTlToBr>
-                    <a:lnBlToTr w="12700" cmpd="sng">
-                      <a:noFill/>
-                      <a:prstDash val="solid"/>
-                    </a:lnBlToTr>
-                    <a:solidFill>
-                      <a:schemeClr val="accent6">
-                        <a:lumMod val="20000"/>
-                        <a:lumOff val="80000"/>
-                      </a:schemeClr>
-                    </a:solidFill>
-                  </a:tcPr>
-                </a:tc>
-                <a:extLst>
-                  <a:ext uri="{0D108BD9-81ED-4DB2-BD59-A6C34878D82A}">
-                    <a16:rowId xmlns:a16="http://schemas.microsoft.com/office/drawing/2014/main" val="1745660695"/>
                   </a:ext>
                 </a:extLst>
               </a:tr>

--- a/Weekly_Log/HG/프로젝트오푸스_송형규_신성재_중간발표.pptx
+++ b/Weekly_Log/HG/프로젝트오푸스_송형규_신성재_중간발표.pptx
@@ -5713,27 +5713,7 @@
                 <a:latin typeface="G마켓 산스 TTF Bold" panose="02000000000000000000" pitchFamily="2" charset="-127"/>
                 <a:ea typeface="G마켓 산스 TTF Bold" panose="02000000000000000000" pitchFamily="2" charset="-127"/>
               </a:rPr>
-              <a:t>개발 내용 </a:t>
-            </a:r>
-            <a:r>
-              <a:rPr lang="en-US" altLang="ko-KR" sz="4800">
-                <a:solidFill>
-                  <a:schemeClr val="bg1"/>
-                </a:solidFill>
-                <a:latin typeface="G마켓 산스 TTF Bold" panose="02000000000000000000" pitchFamily="2" charset="-127"/>
-                <a:ea typeface="G마켓 산스 TTF Bold" panose="02000000000000000000" pitchFamily="2" charset="-127"/>
-              </a:rPr>
-              <a:t>– </a:t>
-            </a:r>
-            <a:r>
-              <a:rPr lang="ko-KR" altLang="en-US" sz="4800">
-                <a:solidFill>
-                  <a:schemeClr val="bg1"/>
-                </a:solidFill>
-                <a:latin typeface="G마켓 산스 TTF Bold" panose="02000000000000000000" pitchFamily="2" charset="-127"/>
-                <a:ea typeface="G마켓 산스 TTF Bold" panose="02000000000000000000" pitchFamily="2" charset="-127"/>
-              </a:rPr>
-              <a:t>게임 시스템</a:t>
+              <a:t>개발 내용</a:t>
             </a:r>
             <a:endParaRPr lang="ko-KR" altLang="en-US" sz="4800" dirty="0">
               <a:solidFill>
@@ -5767,7 +5747,7 @@
         </p:blipFill>
         <p:spPr>
           <a:xfrm>
-            <a:off x="4247205" y="4018445"/>
+            <a:off x="4247204" y="4008196"/>
             <a:ext cx="3697589" cy="1938767"/>
           </a:xfrm>
           <a:prstGeom prst="rect">
@@ -5838,7 +5818,7 @@
         </p:nvSpPr>
         <p:spPr>
           <a:xfrm>
-            <a:off x="9059574" y="5587880"/>
+            <a:off x="9320389" y="5297557"/>
             <a:ext cx="2017644" cy="369332"/>
           </a:xfrm>
           <a:prstGeom prst="rect">
@@ -5944,8 +5924,45 @@
         </p:blipFill>
         <p:spPr>
           <a:xfrm>
-            <a:off x="838200" y="2442789"/>
-            <a:ext cx="2607630" cy="2534791"/>
+            <a:off x="838200" y="2111334"/>
+            <a:ext cx="2948609" cy="2866245"/>
+          </a:xfrm>
+          <a:prstGeom prst="rect">
+            <a:avLst/>
+          </a:prstGeom>
+        </p:spPr>
+      </p:pic>
+      <p:pic>
+        <p:nvPicPr>
+          <p:cNvPr id="13" name="그림 12">
+            <a:extLst>
+              <a:ext uri="{FF2B5EF4-FFF2-40B4-BE49-F238E27FC236}">
+                <a16:creationId xmlns:a16="http://schemas.microsoft.com/office/drawing/2014/main" id="{A69D372A-F298-D2A0-6AE7-9D33137B03AD}"/>
+              </a:ext>
+            </a:extLst>
+          </p:cNvPr>
+          <p:cNvPicPr>
+            <a:picLocks noChangeAspect="1"/>
+          </p:cNvPicPr>
+          <p:nvPr/>
+        </p:nvPicPr>
+        <p:blipFill>
+          <a:blip r:embed="rId5">
+            <a:extLst>
+              <a:ext uri="{28A0092B-C50C-407E-A947-70E740481C1C}">
+                <a14:useLocalDpi xmlns:a14="http://schemas.microsoft.com/office/drawing/2010/main" val="0"/>
+              </a:ext>
+            </a:extLst>
+          </a:blip>
+          <a:srcRect l="11286" r="10813"/>
+          <a:stretch>
+            <a:fillRect/>
+          </a:stretch>
+        </p:blipFill>
+        <p:spPr>
+          <a:xfrm>
+            <a:off x="8094526" y="3038812"/>
+            <a:ext cx="3981725" cy="1938767"/>
           </a:xfrm>
           <a:prstGeom prst="rect">
             <a:avLst/>
@@ -6157,27 +6174,7 @@
                 <a:latin typeface="G마켓 산스 TTF Bold" panose="02000000000000000000" pitchFamily="2" charset="-127"/>
                 <a:ea typeface="G마켓 산스 TTF Bold" panose="02000000000000000000" pitchFamily="2" charset="-127"/>
               </a:rPr>
-              <a:t>개발 내용 </a:t>
-            </a:r>
-            <a:r>
-              <a:rPr lang="en-US" altLang="ko-KR" sz="4800">
-                <a:solidFill>
-                  <a:schemeClr val="bg1"/>
-                </a:solidFill>
-                <a:latin typeface="G마켓 산스 TTF Bold" panose="02000000000000000000" pitchFamily="2" charset="-127"/>
-                <a:ea typeface="G마켓 산스 TTF Bold" panose="02000000000000000000" pitchFamily="2" charset="-127"/>
-              </a:rPr>
-              <a:t>– </a:t>
-            </a:r>
-            <a:r>
-              <a:rPr lang="ko-KR" altLang="en-US" sz="4800">
-                <a:solidFill>
-                  <a:schemeClr val="bg1"/>
-                </a:solidFill>
-                <a:latin typeface="G마켓 산스 TTF Bold" panose="02000000000000000000" pitchFamily="2" charset="-127"/>
-                <a:ea typeface="G마켓 산스 TTF Bold" panose="02000000000000000000" pitchFamily="2" charset="-127"/>
-              </a:rPr>
-              <a:t>시각적 표현</a:t>
+              <a:t>개발 내용</a:t>
             </a:r>
             <a:endParaRPr lang="ko-KR" altLang="en-US" sz="4800" dirty="0">
               <a:solidFill>

--- a/Weekly_Log/HG/프로젝트오푸스_송형규_신성재_중간발표.pptx
+++ b/Weekly_Log/HG/프로젝트오푸스_송형규_신성재_중간발표.pptx
@@ -268,7 +268,7 @@
           <a:p>
             <a:fld id="{4B614FBA-CC48-4B06-BAA0-6C490FF78C72}" type="datetimeFigureOut">
               <a:rPr lang="ko-KR" altLang="en-US" smtClean="0"/>
-              <a:t>2026-03-29</a:t>
+              <a:t>2026-04-01</a:t>
             </a:fld>
             <a:endParaRPr lang="ko-KR" altLang="en-US"/>
           </a:p>
@@ -466,7 +466,7 @@
           <a:p>
             <a:fld id="{4B614FBA-CC48-4B06-BAA0-6C490FF78C72}" type="datetimeFigureOut">
               <a:rPr lang="ko-KR" altLang="en-US" smtClean="0"/>
-              <a:t>2026-03-29</a:t>
+              <a:t>2026-04-01</a:t>
             </a:fld>
             <a:endParaRPr lang="ko-KR" altLang="en-US"/>
           </a:p>
@@ -674,7 +674,7 @@
           <a:p>
             <a:fld id="{4B614FBA-CC48-4B06-BAA0-6C490FF78C72}" type="datetimeFigureOut">
               <a:rPr lang="ko-KR" altLang="en-US" smtClean="0"/>
-              <a:t>2026-03-29</a:t>
+              <a:t>2026-04-01</a:t>
             </a:fld>
             <a:endParaRPr lang="ko-KR" altLang="en-US"/>
           </a:p>
@@ -872,7 +872,7 @@
           <a:p>
             <a:fld id="{4B614FBA-CC48-4B06-BAA0-6C490FF78C72}" type="datetimeFigureOut">
               <a:rPr lang="ko-KR" altLang="en-US" smtClean="0"/>
-              <a:t>2026-03-29</a:t>
+              <a:t>2026-04-01</a:t>
             </a:fld>
             <a:endParaRPr lang="ko-KR" altLang="en-US"/>
           </a:p>
@@ -1147,7 +1147,7 @@
           <a:p>
             <a:fld id="{4B614FBA-CC48-4B06-BAA0-6C490FF78C72}" type="datetimeFigureOut">
               <a:rPr lang="ko-KR" altLang="en-US" smtClean="0"/>
-              <a:t>2026-03-29</a:t>
+              <a:t>2026-04-01</a:t>
             </a:fld>
             <a:endParaRPr lang="ko-KR" altLang="en-US"/>
           </a:p>
@@ -1412,7 +1412,7 @@
           <a:p>
             <a:fld id="{4B614FBA-CC48-4B06-BAA0-6C490FF78C72}" type="datetimeFigureOut">
               <a:rPr lang="ko-KR" altLang="en-US" smtClean="0"/>
-              <a:t>2026-03-29</a:t>
+              <a:t>2026-04-01</a:t>
             </a:fld>
             <a:endParaRPr lang="ko-KR" altLang="en-US"/>
           </a:p>
@@ -1824,7 +1824,7 @@
           <a:p>
             <a:fld id="{4B614FBA-CC48-4B06-BAA0-6C490FF78C72}" type="datetimeFigureOut">
               <a:rPr lang="ko-KR" altLang="en-US" smtClean="0"/>
-              <a:t>2026-03-29</a:t>
+              <a:t>2026-04-01</a:t>
             </a:fld>
             <a:endParaRPr lang="ko-KR" altLang="en-US"/>
           </a:p>
@@ -1965,7 +1965,7 @@
           <a:p>
             <a:fld id="{4B614FBA-CC48-4B06-BAA0-6C490FF78C72}" type="datetimeFigureOut">
               <a:rPr lang="ko-KR" altLang="en-US" smtClean="0"/>
-              <a:t>2026-03-29</a:t>
+              <a:t>2026-04-01</a:t>
             </a:fld>
             <a:endParaRPr lang="ko-KR" altLang="en-US"/>
           </a:p>
@@ -2078,7 +2078,7 @@
           <a:p>
             <a:fld id="{4B614FBA-CC48-4B06-BAA0-6C490FF78C72}" type="datetimeFigureOut">
               <a:rPr lang="ko-KR" altLang="en-US" smtClean="0"/>
-              <a:t>2026-03-29</a:t>
+              <a:t>2026-04-01</a:t>
             </a:fld>
             <a:endParaRPr lang="ko-KR" altLang="en-US"/>
           </a:p>
@@ -2389,7 +2389,7 @@
           <a:p>
             <a:fld id="{4B614FBA-CC48-4B06-BAA0-6C490FF78C72}" type="datetimeFigureOut">
               <a:rPr lang="ko-KR" altLang="en-US" smtClean="0"/>
-              <a:t>2026-03-29</a:t>
+              <a:t>2026-04-01</a:t>
             </a:fld>
             <a:endParaRPr lang="ko-KR" altLang="en-US"/>
           </a:p>
@@ -2677,7 +2677,7 @@
           <a:p>
             <a:fld id="{4B614FBA-CC48-4B06-BAA0-6C490FF78C72}" type="datetimeFigureOut">
               <a:rPr lang="ko-KR" altLang="en-US" smtClean="0"/>
-              <a:t>2026-03-29</a:t>
+              <a:t>2026-04-01</a:t>
             </a:fld>
             <a:endParaRPr lang="ko-KR" altLang="en-US"/>
           </a:p>
@@ -2918,7 +2918,7 @@
           <a:p>
             <a:fld id="{4B614FBA-CC48-4B06-BAA0-6C490FF78C72}" type="datetimeFigureOut">
               <a:rPr lang="ko-KR" altLang="en-US" smtClean="0"/>
-              <a:t>2026-03-29</a:t>
+              <a:t>2026-04-01</a:t>
             </a:fld>
             <a:endParaRPr lang="ko-KR" altLang="en-US"/>
           </a:p>
@@ -6188,36 +6188,6 @@
       </p:sp>
       <p:pic>
         <p:nvPicPr>
-          <p:cNvPr id="7" name="그림 6">
-            <a:extLst>
-              <a:ext uri="{FF2B5EF4-FFF2-40B4-BE49-F238E27FC236}">
-                <a16:creationId xmlns:a16="http://schemas.microsoft.com/office/drawing/2014/main" id="{7C19FEE3-4AC4-7E73-3ACD-C79212A3289C}"/>
-              </a:ext>
-            </a:extLst>
-          </p:cNvPr>
-          <p:cNvPicPr>
-            <a:picLocks noChangeAspect="1"/>
-          </p:cNvPicPr>
-          <p:nvPr/>
-        </p:nvPicPr>
-        <p:blipFill>
-          <a:blip r:embed="rId3"/>
-          <a:stretch>
-            <a:fillRect/>
-          </a:stretch>
-        </p:blipFill>
-        <p:spPr>
-          <a:xfrm>
-            <a:off x="7117968" y="2491123"/>
-            <a:ext cx="3808449" cy="3104608"/>
-          </a:xfrm>
-          <a:prstGeom prst="rect">
-            <a:avLst/>
-          </a:prstGeom>
-        </p:spPr>
-      </p:pic>
-      <p:pic>
-        <p:nvPicPr>
           <p:cNvPr id="9" name="그림 8">
             <a:extLst>
               <a:ext uri="{FF2B5EF4-FFF2-40B4-BE49-F238E27FC236}">
@@ -6231,7 +6201,7 @@
           <p:nvPr/>
         </p:nvPicPr>
         <p:blipFill>
-          <a:blip r:embed="rId4"/>
+          <a:blip r:embed="rId3"/>
           <a:stretch>
             <a:fillRect/>
           </a:stretch>
@@ -6344,6 +6314,42 @@
           </a:p>
         </p:txBody>
       </p:sp>
+      <p:pic>
+        <p:nvPicPr>
+          <p:cNvPr id="8" name="그림 7">
+            <a:extLst>
+              <a:ext uri="{FF2B5EF4-FFF2-40B4-BE49-F238E27FC236}">
+                <a16:creationId xmlns:a16="http://schemas.microsoft.com/office/drawing/2014/main" id="{D6974D42-52E4-E8BB-5C39-D2E8FD1D2368}"/>
+              </a:ext>
+            </a:extLst>
+          </p:cNvPr>
+          <p:cNvPicPr>
+            <a:picLocks noChangeAspect="1"/>
+          </p:cNvPicPr>
+          <p:nvPr/>
+        </p:nvPicPr>
+        <p:blipFill>
+          <a:blip r:embed="rId4">
+            <a:extLst>
+              <a:ext uri="{28A0092B-C50C-407E-A947-70E740481C1C}">
+                <a14:useLocalDpi xmlns:a14="http://schemas.microsoft.com/office/drawing/2010/main" val="0"/>
+              </a:ext>
+            </a:extLst>
+          </a:blip>
+          <a:stretch>
+            <a:fillRect/>
+          </a:stretch>
+        </p:blipFill>
+        <p:spPr>
+          <a:xfrm>
+            <a:off x="7131817" y="2663211"/>
+            <a:ext cx="3658103" cy="2662033"/>
+          </a:xfrm>
+          <a:prstGeom prst="rect">
+            <a:avLst/>
+          </a:prstGeom>
+        </p:spPr>
+      </p:pic>
     </p:spTree>
     <p:extLst>
       <p:ext uri="{BB962C8B-B14F-4D97-AF65-F5344CB8AC3E}">
